--- a/презнтация с текстом/Suknevich_prezentatsia.pptx
+++ b/презнтация с текстом/Suknevich_prezentatsia.pptx
@@ -11,11 +11,11 @@
     <p:sldId id="259" r:id="rId5"/>
     <p:sldId id="260" r:id="rId6"/>
     <p:sldId id="261" r:id="rId7"/>
-    <p:sldId id="262" r:id="rId8"/>
-    <p:sldId id="263" r:id="rId9"/>
-    <p:sldId id="269" r:id="rId10"/>
-    <p:sldId id="264" r:id="rId11"/>
-    <p:sldId id="268" r:id="rId12"/>
+    <p:sldId id="270" r:id="rId8"/>
+    <p:sldId id="271" r:id="rId9"/>
+    <p:sldId id="263" r:id="rId10"/>
+    <p:sldId id="269" r:id="rId11"/>
+    <p:sldId id="264" r:id="rId12"/>
   </p:sldIdLst>
   <p:sldSz cx="12192000" cy="6858000"/>
   <p:notesSz cx="12192000" cy="6858000"/>
@@ -116,7 +116,7 @@
   </p:defaultTextStyle>
   <p:extLst>
     <p:ext uri="{EFAFB233-063F-42B5-8137-9DF3F51BA10A}">
-      <p15:sldGuideLst xmlns:p15="http://schemas.microsoft.com/office/powerpoint/2012/main">
+      <p15:sldGuideLst xmlns:p15="http://schemas.microsoft.com/office/powerpoint/2012/main" xmlns="">
         <p15:guide id="1" orient="horz" pos="2160">
           <p15:clr>
             <a:srgbClr val="A4A3A4"/>
@@ -134,7 +134,7 @@
 </file>
 
 <file path=ppt/charts/chart1.xml><?xml version="1.0" encoding="utf-8"?>
-<c:chartSpace xmlns:c="http://schemas.openxmlformats.org/drawingml/2006/chart" xmlns:a="http://schemas.openxmlformats.org/drawingml/2006/main" xmlns:r="http://schemas.openxmlformats.org/officeDocument/2006/relationships" xmlns:c16r2="http://schemas.microsoft.com/office/drawing/2015/06/chart">
+<c:chartSpace xmlns:c="http://schemas.openxmlformats.org/drawingml/2006/chart" xmlns:a="http://schemas.openxmlformats.org/drawingml/2006/main" xmlns:r="http://schemas.openxmlformats.org/officeDocument/2006/relationships">
   <c:date1904 val="0"/>
   <c:lang val="ru-RU"/>
   <c:roundedCorners val="0"/>
@@ -221,8 +221,10 @@
             <c:showPercent val="1"/>
             <c:showBubbleSize val="0"/>
             <c:showLeaderLines val="1"/>
-            <c:extLst>
-              <c:ext xmlns:c15="http://schemas.microsoft.com/office/drawing/2012/chart" uri="{CE6537A1-D6FC-4f65-9D91-7224C49458BB}"/>
+            <c:extLst xmlns:c16r2="http://schemas.microsoft.com/office/drawing/2015/06/chart">
+              <c:ext xmlns:c15="http://schemas.microsoft.com/office/drawing/2012/chart" uri="{CE6537A1-D6FC-4f65-9D91-7224C49458BB}">
+                <c15:layout/>
+              </c:ext>
             </c:extLst>
           </c:dLbls>
           <c:cat>
@@ -273,7 +275,7 @@
               </c:numCache>
             </c:numRef>
           </c:val>
-          <c:extLst>
+          <c:extLst xmlns:c16r2="http://schemas.microsoft.com/office/drawing/2015/06/chart">
             <c:ext xmlns:c16="http://schemas.microsoft.com/office/drawing/2014/chart" uri="{C3380CC4-5D6E-409C-BE32-E72D297353CC}">
               <c16:uniqueId val="{00000000-61DD-4E37-98CA-3404DE83630F}"/>
             </c:ext>
@@ -525,7 +527,7 @@
             </a:pPr>
             <a:fld id="{28E80666-FB37-4B36-9149-507F3B0178E3}" type="datetimeFigureOut">
               <a:rPr lang="en-US"/>
-              <a:t>12/25/2025</a:t>
+              <a:t>3/19/2026</a:t>
             </a:fld>
             <a:endParaRPr lang="en-US"/>
           </a:p>
@@ -716,7 +718,7 @@
             </a:pPr>
             <a:fld id="{28E80666-FB37-4B36-9149-507F3B0178E3}" type="datetimeFigureOut">
               <a:rPr lang="en-US"/>
-              <a:t>12/25/2025</a:t>
+              <a:t>3/19/2026</a:t>
             </a:fld>
             <a:endParaRPr lang="en-US"/>
           </a:p>
@@ -917,7 +919,7 @@
             </a:pPr>
             <a:fld id="{28E80666-FB37-4B36-9149-507F3B0178E3}" type="datetimeFigureOut">
               <a:rPr lang="en-US"/>
-              <a:t>12/25/2025</a:t>
+              <a:t>3/19/2026</a:t>
             </a:fld>
             <a:endParaRPr lang="en-US"/>
           </a:p>
@@ -1108,7 +1110,7 @@
             </a:pPr>
             <a:fld id="{28E80666-FB37-4B36-9149-507F3B0178E3}" type="datetimeFigureOut">
               <a:rPr lang="en-US"/>
-              <a:t>12/25/2025</a:t>
+              <a:t>3/19/2026</a:t>
             </a:fld>
             <a:endParaRPr lang="en-US"/>
           </a:p>
@@ -1364,7 +1366,7 @@
             </a:pPr>
             <a:fld id="{28E80666-FB37-4B36-9149-507F3B0178E3}" type="datetimeFigureOut">
               <a:rPr lang="en-US"/>
-              <a:t>12/25/2025</a:t>
+              <a:t>3/19/2026</a:t>
             </a:fld>
             <a:endParaRPr lang="en-US"/>
           </a:p>
@@ -1687,7 +1689,7 @@
             </a:pPr>
             <a:fld id="{28E80666-FB37-4B36-9149-507F3B0178E3}" type="datetimeFigureOut">
               <a:rPr lang="en-US"/>
-              <a:t>12/25/2025</a:t>
+              <a:t>3/19/2026</a:t>
             </a:fld>
             <a:endParaRPr lang="en-US"/>
           </a:p>
@@ -2155,7 +2157,7 @@
             </a:pPr>
             <a:fld id="{28E80666-FB37-4B36-9149-507F3B0178E3}" type="datetimeFigureOut">
               <a:rPr lang="en-US"/>
-              <a:t>12/25/2025</a:t>
+              <a:t>3/19/2026</a:t>
             </a:fld>
             <a:endParaRPr lang="en-US"/>
           </a:p>
@@ -2280,7 +2282,7 @@
             </a:pPr>
             <a:fld id="{28E80666-FB37-4B36-9149-507F3B0178E3}" type="datetimeFigureOut">
               <a:rPr lang="en-US"/>
-              <a:t>12/25/2025</a:t>
+              <a:t>3/19/2026</a:t>
             </a:fld>
             <a:endParaRPr lang="en-US"/>
           </a:p>
@@ -2379,7 +2381,7 @@
             </a:pPr>
             <a:fld id="{28E80666-FB37-4B36-9149-507F3B0178E3}" type="datetimeFigureOut">
               <a:rPr lang="en-US"/>
-              <a:t>12/25/2025</a:t>
+              <a:t>3/19/2026</a:t>
             </a:fld>
             <a:endParaRPr lang="en-US"/>
           </a:p>
@@ -2680,7 +2682,7 @@
             </a:pPr>
             <a:fld id="{28E80666-FB37-4B36-9149-507F3B0178E3}" type="datetimeFigureOut">
               <a:rPr lang="en-US"/>
-              <a:t>12/25/2025</a:t>
+              <a:t>3/19/2026</a:t>
             </a:fld>
             <a:endParaRPr lang="en-US"/>
           </a:p>
@@ -2946,7 +2948,7 @@
             </a:pPr>
             <a:fld id="{28E80666-FB37-4B36-9149-507F3B0178E3}" type="datetimeFigureOut">
               <a:rPr lang="en-US"/>
-              <a:t>12/25/2025</a:t>
+              <a:t>3/19/2026</a:t>
             </a:fld>
             <a:endParaRPr lang="en-US"/>
           </a:p>
@@ -3180,7 +3182,7 @@
             </a:pPr>
             <a:fld id="{28E80666-FB37-4B36-9149-507F3B0178E3}" type="datetimeFigureOut">
               <a:rPr lang="en-US"/>
-              <a:t>12/25/2025</a:t>
+              <a:t>3/19/2026</a:t>
             </a:fld>
             <a:endParaRPr lang="en-US"/>
           </a:p>
@@ -3582,7 +3584,7 @@
               <a:defRPr/>
             </a:pPr>
             <a:r>
-              <a:rPr sz="1600" b="0" i="0" u="none">
+              <a:rPr sz="1600" b="0" i="0" u="none" dirty="0">
                 <a:solidFill>
                   <a:srgbClr val="000000"/>
                 </a:solidFill>
@@ -3592,7 +3594,7 @@
               </a:rPr>
               <a:t>МУНИЦИПАЛЬНОЕ БЮДЖЕТНОЕ ОБЩЕОБРАЗОВАТЕЛЬНОЕ УЧРЕЖДЕНИЕ «СРЕДНЯЯ ОБЩЕОБРАЗОВАТЕЛЬНАЯ ШКОЛА №135» ИМ. АКАДЕМИКА Б.В. ЛИТВИНОВА</a:t>
             </a:r>
-            <a:endParaRPr sz="1600"/>
+            <a:endParaRPr sz="1600" dirty="0"/>
           </a:p>
         </p:txBody>
       </p:sp>
@@ -3622,146 +3624,7 @@
               <a:defRPr/>
             </a:pPr>
             <a:r>
-              <a:rPr sz="2400" b="1" i="0" u="none" dirty="0" err="1">
-                <a:solidFill>
-                  <a:srgbClr val="000000"/>
-                </a:solidFill>
-                <a:latin typeface="Times New Roman"/>
-                <a:ea typeface="Times New Roman"/>
-                <a:cs typeface="Times New Roman"/>
-              </a:rPr>
-              <a:t>Индивидуальный</a:t>
-            </a:r>
-            <a:r>
-              <a:rPr sz="2400" b="1" i="0" u="none" dirty="0">
-                <a:solidFill>
-                  <a:srgbClr val="000000"/>
-                </a:solidFill>
-                <a:latin typeface="Times New Roman"/>
-                <a:ea typeface="Times New Roman"/>
-                <a:cs typeface="Times New Roman"/>
-              </a:rPr>
-              <a:t> </a:t>
-            </a:r>
-            <a:r>
-              <a:rPr sz="2400" b="1" i="0" u="none" dirty="0" err="1">
-                <a:solidFill>
-                  <a:srgbClr val="000000"/>
-                </a:solidFill>
-                <a:latin typeface="Times New Roman"/>
-                <a:ea typeface="Times New Roman"/>
-                <a:cs typeface="Times New Roman"/>
-              </a:rPr>
-              <a:t>проект</a:t>
-            </a:r>
-            <a:endParaRPr sz="2400" dirty="0"/>
-          </a:p>
-          <a:p>
-            <a:pPr>
-              <a:defRPr/>
-            </a:pPr>
-            <a:r>
-              <a:rPr sz="2400" b="0" i="0" u="none" dirty="0" err="1">
-                <a:solidFill>
-                  <a:srgbClr val="000000"/>
-                </a:solidFill>
-                <a:latin typeface="Times New Roman"/>
-                <a:ea typeface="Times New Roman"/>
-                <a:cs typeface="Times New Roman"/>
-              </a:rPr>
-              <a:t>Тип</a:t>
-            </a:r>
-            <a:r>
-              <a:rPr sz="2400" b="0" i="0" u="none" dirty="0">
-                <a:solidFill>
-                  <a:srgbClr val="000000"/>
-                </a:solidFill>
-                <a:latin typeface="Times New Roman"/>
-                <a:ea typeface="Times New Roman"/>
-                <a:cs typeface="Times New Roman"/>
-              </a:rPr>
-              <a:t> </a:t>
-            </a:r>
-            <a:r>
-              <a:rPr sz="2400" b="0" i="0" u="none" dirty="0" err="1">
-                <a:solidFill>
-                  <a:srgbClr val="000000"/>
-                </a:solidFill>
-                <a:latin typeface="Times New Roman"/>
-                <a:ea typeface="Times New Roman"/>
-                <a:cs typeface="Times New Roman"/>
-              </a:rPr>
-              <a:t>проекта</a:t>
-            </a:r>
-            <a:r>
-              <a:rPr sz="2400" b="0" i="0" u="none" dirty="0">
-                <a:solidFill>
-                  <a:srgbClr val="000000"/>
-                </a:solidFill>
-                <a:latin typeface="Times New Roman"/>
-                <a:ea typeface="Times New Roman"/>
-                <a:cs typeface="Times New Roman"/>
-              </a:rPr>
-              <a:t>: </a:t>
-            </a:r>
-            <a:r>
-              <a:rPr sz="2400" b="0" i="0" u="none" dirty="0" err="1">
-                <a:solidFill>
-                  <a:srgbClr val="000000"/>
-                </a:solidFill>
-                <a:latin typeface="Times New Roman"/>
-                <a:ea typeface="Times New Roman"/>
-                <a:cs typeface="Times New Roman"/>
-              </a:rPr>
-              <a:t>социальный</a:t>
-            </a:r>
-            <a:endParaRPr sz="2400" dirty="0"/>
-          </a:p>
-          <a:p>
-            <a:pPr>
-              <a:defRPr/>
-            </a:pPr>
-            <a:r>
-              <a:rPr sz="2400" b="0" i="0" u="none" dirty="0" err="1">
-                <a:solidFill>
-                  <a:srgbClr val="000000"/>
-                </a:solidFill>
-                <a:latin typeface="Times New Roman"/>
-                <a:ea typeface="Times New Roman"/>
-                <a:cs typeface="Times New Roman"/>
-              </a:rPr>
-              <a:t>Тема</a:t>
-            </a:r>
-            <a:r>
-              <a:rPr sz="2400" b="0" i="0" u="none" dirty="0">
-                <a:solidFill>
-                  <a:srgbClr val="000000"/>
-                </a:solidFill>
-                <a:latin typeface="Times New Roman"/>
-                <a:ea typeface="Times New Roman"/>
-                <a:cs typeface="Times New Roman"/>
-              </a:rPr>
-              <a:t> </a:t>
-            </a:r>
-            <a:r>
-              <a:rPr sz="2400" b="0" i="0" u="none" dirty="0" err="1">
-                <a:solidFill>
-                  <a:srgbClr val="000000"/>
-                </a:solidFill>
-                <a:latin typeface="Times New Roman"/>
-                <a:ea typeface="Times New Roman"/>
-                <a:cs typeface="Times New Roman"/>
-              </a:rPr>
-              <a:t>проекта</a:t>
-            </a:r>
-            <a:endParaRPr sz="2400" dirty="0"/>
-          </a:p>
-          <a:p>
-            <a:pPr>
-              <a:defRPr/>
-            </a:pPr>
-            <a:r>
-              <a:rPr sz="2400" b="1" i="0" u="none" dirty="0">
+              <a:rPr sz="2400" b="1" i="0" u="none" dirty="0" smtClean="0">
                 <a:solidFill>
                   <a:srgbClr val="000000"/>
                 </a:solidFill>
@@ -3860,8 +3723,8 @@
         </p:nvSpPr>
         <p:spPr bwMode="auto">
           <a:xfrm>
-            <a:off x="6868499" y="4235391"/>
-            <a:ext cx="5347567" cy="1077218"/>
+            <a:off x="6999891" y="4300935"/>
+            <a:ext cx="5799500" cy="1077218"/>
           </a:xfrm>
           <a:prstGeom prst="rect">
             <a:avLst/>
@@ -4033,7 +3896,7 @@
               <a:t>: </a:t>
             </a:r>
             <a:r>
-              <a:rPr lang="ru-RU" sz="1600" dirty="0" err="1">
+              <a:rPr lang="ru-RU" sz="1600" dirty="0">
                 <a:solidFill>
                   <a:srgbClr val="000000"/>
                 </a:solidFill>
@@ -4041,10 +3904,10 @@
                 <a:ea typeface="Times New Roman"/>
                 <a:cs typeface="Times New Roman"/>
               </a:rPr>
-              <a:t>Сагайдачная</a:t>
-            </a:r>
-            <a:r>
-              <a:rPr lang="ru-RU" sz="1600" dirty="0">
+              <a:t>Сагайдачная Полина </a:t>
+            </a:r>
+            <a:r>
+              <a:rPr lang="ru-RU" sz="1600" dirty="0" smtClean="0">
                 <a:solidFill>
                   <a:srgbClr val="000000"/>
                 </a:solidFill>
@@ -4052,7 +3915,7 @@
                 <a:ea typeface="Times New Roman"/>
                 <a:cs typeface="Times New Roman"/>
               </a:rPr>
-              <a:t> Полина Вячеславовна</a:t>
+              <a:t>Вячеславовна</a:t>
             </a:r>
             <a:endParaRPr lang="en-US" sz="1600" dirty="0">
               <a:solidFill>
@@ -4103,6 +3966,78 @@
               <a:defRPr/>
             </a:pPr>
             <a:r>
+              <a:rPr lang="ru-RU" sz="1600" dirty="0" smtClean="0">
+                <a:solidFill>
+                  <a:srgbClr val="000000"/>
+                </a:solidFill>
+                <a:latin typeface="Times New Roman"/>
+                <a:ea typeface="Times New Roman"/>
+                <a:cs typeface="Times New Roman"/>
+              </a:rPr>
+              <a:t>г</a:t>
+            </a:r>
+            <a:r>
+              <a:rPr sz="1600" b="0" i="0" u="none" dirty="0" smtClean="0">
+                <a:solidFill>
+                  <a:srgbClr val="000000"/>
+                </a:solidFill>
+                <a:latin typeface="Times New Roman"/>
+                <a:ea typeface="Times New Roman"/>
+                <a:cs typeface="Times New Roman"/>
+              </a:rPr>
+              <a:t>. </a:t>
+            </a:r>
+            <a:r>
+              <a:rPr sz="1600" b="0" i="0" u="none" dirty="0" err="1">
+                <a:solidFill>
+                  <a:srgbClr val="000000"/>
+                </a:solidFill>
+                <a:latin typeface="Times New Roman"/>
+                <a:ea typeface="Times New Roman"/>
+                <a:cs typeface="Times New Roman"/>
+              </a:rPr>
+              <a:t>Снежинск</a:t>
+            </a:r>
+            <a:endParaRPr sz="1600" dirty="0"/>
+          </a:p>
+          <a:p>
+            <a:pPr algn="ctr">
+              <a:defRPr/>
+            </a:pPr>
+            <a:r>
+              <a:rPr sz="1600" b="0" i="0" u="none" dirty="0" smtClean="0">
+                <a:solidFill>
+                  <a:srgbClr val="000000"/>
+                </a:solidFill>
+                <a:latin typeface="Times New Roman"/>
+                <a:ea typeface="Times New Roman"/>
+                <a:cs typeface="Times New Roman"/>
+              </a:rPr>
+              <a:t>202</a:t>
+            </a:r>
+            <a:r>
+              <a:rPr lang="en-US" sz="1600" dirty="0">
+                <a:solidFill>
+                  <a:srgbClr val="000000"/>
+                </a:solidFill>
+                <a:latin typeface="Times New Roman"/>
+                <a:ea typeface="Times New Roman"/>
+                <a:cs typeface="Times New Roman"/>
+              </a:rPr>
+              <a:t>6</a:t>
+            </a:r>
+            <a:r>
+              <a:rPr sz="1600" b="0" i="0" u="none" dirty="0" smtClean="0">
+                <a:solidFill>
+                  <a:srgbClr val="000000"/>
+                </a:solidFill>
+                <a:latin typeface="Times New Roman"/>
+                <a:ea typeface="Times New Roman"/>
+                <a:cs typeface="Times New Roman"/>
+              </a:rPr>
+              <a:t> </a:t>
+            </a:r>
+            <a:r>
               <a:rPr sz="1600" b="0" i="0" u="none" dirty="0">
                 <a:solidFill>
                   <a:srgbClr val="000000"/>
@@ -4111,57 +4046,7 @@
                 <a:ea typeface="Times New Roman"/>
                 <a:cs typeface="Times New Roman"/>
               </a:rPr>
-              <a:t>Г. </a:t>
-            </a:r>
-            <a:r>
-              <a:rPr sz="1600" b="0" i="0" u="none" dirty="0" err="1">
-                <a:solidFill>
-                  <a:srgbClr val="000000"/>
-                </a:solidFill>
-                <a:latin typeface="Times New Roman"/>
-                <a:ea typeface="Times New Roman"/>
-                <a:cs typeface="Times New Roman"/>
-              </a:rPr>
-              <a:t>Снежинск</a:t>
-            </a:r>
-            <a:endParaRPr sz="1600" dirty="0"/>
-          </a:p>
-          <a:p>
-            <a:pPr algn="ctr">
-              <a:defRPr/>
-            </a:pPr>
-            <a:r>
-              <a:rPr sz="1600" b="0" i="0" u="none" dirty="0">
-                <a:solidFill>
-                  <a:srgbClr val="000000"/>
-                </a:solidFill>
-                <a:latin typeface="Times New Roman"/>
-                <a:ea typeface="Times New Roman"/>
-                <a:cs typeface="Times New Roman"/>
-              </a:rPr>
-              <a:t>202</a:t>
-            </a:r>
-            <a:r>
-              <a:rPr lang="ru-RU" sz="1600" b="0" i="0" u="none" dirty="0">
-                <a:solidFill>
-                  <a:srgbClr val="000000"/>
-                </a:solidFill>
-                <a:latin typeface="Times New Roman"/>
-                <a:ea typeface="Times New Roman"/>
-                <a:cs typeface="Times New Roman"/>
-              </a:rPr>
-              <a:t>5</a:t>
-            </a:r>
-            <a:r>
-              <a:rPr sz="1600" b="0" i="0" u="none" dirty="0">
-                <a:solidFill>
-                  <a:srgbClr val="000000"/>
-                </a:solidFill>
-                <a:latin typeface="Times New Roman"/>
-                <a:ea typeface="Times New Roman"/>
-                <a:cs typeface="Times New Roman"/>
-              </a:rPr>
-              <a:t> г.</a:t>
+              <a:t>г.</a:t>
             </a:r>
             <a:endParaRPr sz="1600" dirty="0"/>
           </a:p>
@@ -4176,6 +4061,136 @@
 </file>
 
 <file path=ppt/slides/slide10.xml><?xml version="1.0" encoding="utf-8"?>
+<p:sld xmlns:a="http://schemas.openxmlformats.org/drawingml/2006/main" xmlns:r="http://schemas.openxmlformats.org/officeDocument/2006/relationships" xmlns:p="http://schemas.openxmlformats.org/presentationml/2006/main">
+  <p:cSld>
+    <p:spTree>
+      <p:nvGrpSpPr>
+        <p:cNvPr id="1" name=""/>
+        <p:cNvGrpSpPr/>
+        <p:nvPr/>
+      </p:nvGrpSpPr>
+      <p:grpSpPr>
+        <a:xfrm>
+          <a:off x="0" y="0"/>
+          <a:ext cx="0" cy="0"/>
+          <a:chOff x="0" y="0"/>
+          <a:chExt cx="0" cy="0"/>
+        </a:xfrm>
+      </p:grpSpPr>
+      <p:sp>
+        <p:nvSpPr>
+          <p:cNvPr id="2" name="Заголовок 1"/>
+          <p:cNvSpPr>
+            <a:spLocks noGrp="1"/>
+          </p:cNvSpPr>
+          <p:nvPr>
+            <p:ph type="title"/>
+          </p:nvPr>
+        </p:nvSpPr>
+        <p:spPr/>
+        <p:txBody>
+          <a:bodyPr>
+            <a:normAutofit/>
+          </a:bodyPr>
+          <a:lstStyle/>
+          <a:p>
+            <a:r>
+              <a:rPr lang="ru-RU" sz="3200" b="1" dirty="0">
+                <a:latin typeface="Times New Roman" pitchFamily="18" charset="0"/>
+                <a:cs typeface="Times New Roman" pitchFamily="18" charset="0"/>
+              </a:rPr>
+              <a:t>Ссылки на материал проекта</a:t>
+            </a:r>
+            <a:endParaRPr lang="ru-RU" sz="3200" dirty="0">
+              <a:effectLst/>
+              <a:latin typeface="Times New Roman" pitchFamily="18" charset="0"/>
+              <a:cs typeface="Times New Roman" pitchFamily="18" charset="0"/>
+            </a:endParaRPr>
+          </a:p>
+        </p:txBody>
+      </p:sp>
+      <p:sp>
+        <p:nvSpPr>
+          <p:cNvPr id="3" name="Объект 2"/>
+          <p:cNvSpPr>
+            <a:spLocks noGrp="1"/>
+          </p:cNvSpPr>
+          <p:nvPr>
+            <p:ph idx="1"/>
+          </p:nvPr>
+        </p:nvSpPr>
+        <p:spPr>
+          <a:xfrm>
+            <a:off x="609600" y="1600203"/>
+            <a:ext cx="11389360" cy="4525963"/>
+          </a:xfrm>
+        </p:spPr>
+        <p:txBody>
+          <a:bodyPr>
+            <a:normAutofit/>
+          </a:bodyPr>
+          <a:lstStyle/>
+          <a:p>
+            <a:pPr marL="514350" indent="-514350">
+              <a:buFont typeface="+mj-lt"/>
+              <a:buAutoNum type="arabicPeriod"/>
+            </a:pPr>
+            <a:r>
+              <a:rPr lang="ru-RU" sz="2400" dirty="0">
+                <a:latin typeface="Times New Roman" pitchFamily="18" charset="0"/>
+                <a:cs typeface="Times New Roman" pitchFamily="18" charset="0"/>
+              </a:rPr>
+              <a:t>Трудовой кодекс - действующая редакция, актуальность 2025 г. [Электронный ресурс] trudinspection.ru/kodeks.html.</a:t>
+            </a:r>
+          </a:p>
+          <a:p>
+            <a:pPr marL="514350" indent="-514350">
+              <a:buFont typeface="+mj-lt"/>
+              <a:buAutoNum type="arabicPeriod"/>
+            </a:pPr>
+            <a:r>
+              <a:rPr lang="ru-RU" sz="2400" dirty="0">
+                <a:latin typeface="Times New Roman" pitchFamily="18" charset="0"/>
+                <a:cs typeface="Times New Roman" pitchFamily="18" charset="0"/>
+              </a:rPr>
+              <a:t>Сайт на программу в которой я  писал код(</a:t>
+            </a:r>
+            <a:r>
+              <a:rPr lang="en-US" sz="2400" dirty="0">
+                <a:latin typeface="Times New Roman" pitchFamily="18" charset="0"/>
+                <a:cs typeface="Times New Roman" pitchFamily="18" charset="0"/>
+                <a:hlinkClick r:id="rId2"/>
+              </a:rPr>
+              <a:t>https://code.visualstudio.com/</a:t>
+            </a:r>
+            <a:r>
+              <a:rPr lang="ru-RU" sz="2400" dirty="0" smtClean="0">
+                <a:latin typeface="Times New Roman" pitchFamily="18" charset="0"/>
+                <a:cs typeface="Times New Roman" pitchFamily="18" charset="0"/>
+              </a:rPr>
+              <a:t>)</a:t>
+            </a:r>
+            <a:endParaRPr lang="en-US" sz="2400" dirty="0">
+              <a:latin typeface="Times New Roman" pitchFamily="18" charset="0"/>
+              <a:cs typeface="Times New Roman" pitchFamily="18" charset="0"/>
+            </a:endParaRPr>
+          </a:p>
+        </p:txBody>
+      </p:sp>
+    </p:spTree>
+    <p:extLst>
+      <p:ext uri="{BB962C8B-B14F-4D97-AF65-F5344CB8AC3E}">
+        <p14:creationId xmlns:p14="http://schemas.microsoft.com/office/powerpoint/2010/main" val="443332714"/>
+      </p:ext>
+    </p:extLst>
+  </p:cSld>
+  <p:clrMapOvr>
+    <a:masterClrMapping/>
+  </p:clrMapOvr>
+</p:sld>
+</file>
+
+<file path=ppt/slides/slide11.xml><?xml version="1.0" encoding="utf-8"?>
 <p:sld xmlns:a="http://schemas.openxmlformats.org/drawingml/2006/main" xmlns:r="http://schemas.openxmlformats.org/officeDocument/2006/relationships" xmlns:p="http://schemas.openxmlformats.org/presentationml/2006/main" showMasterPhAnim="0">
   <p:cSld>
     <p:spTree>
@@ -4293,681 +4308,53 @@
           <a:lstStyle/>
           <a:p>
             <a:r>
-              <a:rPr lang="ru-RU" sz="2800" dirty="0"/>
+              <a:rPr lang="ru-RU" sz="2800" dirty="0">
+                <a:latin typeface="Times New Roman" pitchFamily="18" charset="0"/>
+                <a:cs typeface="Times New Roman" pitchFamily="18" charset="0"/>
+              </a:rPr>
               <a:t>Для достижения результата, в ходе проектной работы был создан сайт, содержащий информацию о видах и способах заработка.  Я посетил Центр занятости населения города </a:t>
             </a:r>
             <a:r>
-              <a:rPr lang="ru-RU" sz="2800" dirty="0" err="1"/>
+              <a:rPr lang="ru-RU" sz="2800" dirty="0" err="1">
+                <a:latin typeface="Times New Roman" pitchFamily="18" charset="0"/>
+                <a:cs typeface="Times New Roman" pitchFamily="18" charset="0"/>
+              </a:rPr>
               <a:t>Снежинска</a:t>
             </a:r>
             <a:r>
-              <a:rPr lang="ru-RU" sz="2800" dirty="0"/>
+              <a:rPr lang="ru-RU" sz="2800" dirty="0">
+                <a:latin typeface="Times New Roman" pitchFamily="18" charset="0"/>
+                <a:cs typeface="Times New Roman" pitchFamily="18" charset="0"/>
+              </a:rPr>
               <a:t> и изучил виды работ доступные несовершеннолетним, а также перечень документов необходимый для устройства на работу.</a:t>
             </a:r>
           </a:p>
           <a:p>
             <a:r>
-              <a:rPr lang="ru-RU" sz="2800" dirty="0"/>
+              <a:rPr lang="ru-RU" sz="2800" dirty="0">
+                <a:latin typeface="Times New Roman" pitchFamily="18" charset="0"/>
+                <a:cs typeface="Times New Roman" pitchFamily="18" charset="0"/>
+              </a:rPr>
               <a:t>	В процессе выполнения задач проекта был создан сайт с перечнем документов для подачи заявления по временному трудоустройству, где находится ЦНЗ (центр занятости несовершеннолетних), а также вакансиями для подростков в нашем городе.</a:t>
             </a:r>
           </a:p>
           <a:p>
             <a:r>
-              <a:rPr lang="ru-RU" sz="2800" dirty="0"/>
+              <a:rPr lang="ru-RU" sz="2800" dirty="0">
+                <a:latin typeface="Times New Roman" pitchFamily="18" charset="0"/>
+                <a:cs typeface="Times New Roman" pitchFamily="18" charset="0"/>
+              </a:rPr>
               <a:t>	Надеюсь, мой сайт поможет школьникам узнать, что они могут начать зарабатывать уже сейчас и быть относительно независимыми в финансах от родителей.</a:t>
             </a:r>
             <a:endParaRPr lang="ru-RU" sz="2800" dirty="0">
               <a:effectLst/>
+              <a:latin typeface="Times New Roman" pitchFamily="18" charset="0"/>
+              <a:cs typeface="Times New Roman" pitchFamily="18" charset="0"/>
             </a:endParaRPr>
           </a:p>
         </p:txBody>
       </p:sp>
     </p:spTree>
-  </p:cSld>
-  <p:clrMapOvr>
-    <a:masterClrMapping/>
-  </p:clrMapOvr>
-</p:sld>
-</file>
-
-<file path=ppt/slides/slide11.xml><?xml version="1.0" encoding="utf-8"?>
-<p:sld xmlns:a="http://schemas.openxmlformats.org/drawingml/2006/main" xmlns:r="http://schemas.openxmlformats.org/officeDocument/2006/relationships" xmlns:p="http://schemas.openxmlformats.org/presentationml/2006/main" showMasterPhAnim="0">
-  <p:cSld>
-    <p:spTree>
-      <p:nvGrpSpPr>
-        <p:cNvPr id="1" name=""/>
-        <p:cNvGrpSpPr/>
-        <p:nvPr/>
-      </p:nvGrpSpPr>
-      <p:grpSpPr bwMode="auto">
-        <a:xfrm>
-          <a:off x="0" y="0"/>
-          <a:ext cx="0" cy="0"/>
-          <a:chOff x="0" y="0"/>
-          <a:chExt cx="0" cy="0"/>
-        </a:xfrm>
-      </p:grpSpPr>
-      <p:sp>
-        <p:nvSpPr>
-          <p:cNvPr id="1951085968" name="Заголовок 1"/>
-          <p:cNvSpPr>
-            <a:spLocks noGrp="1"/>
-          </p:cNvSpPr>
-          <p:nvPr>
-            <p:ph type="ctrTitle"/>
-          </p:nvPr>
-        </p:nvSpPr>
-        <p:spPr bwMode="auto">
-          <a:xfrm>
-            <a:off x="256030" y="109488"/>
-            <a:ext cx="11640312" cy="1652634"/>
-          </a:xfrm>
-        </p:spPr>
-        <p:txBody>
-          <a:bodyPr>
-            <a:normAutofit/>
-          </a:bodyPr>
-          <a:lstStyle/>
-          <a:p>
-            <a:pPr>
-              <a:defRPr/>
-            </a:pPr>
-            <a:r>
-              <a:rPr sz="1600" b="0" i="0" u="none">
-                <a:solidFill>
-                  <a:srgbClr val="000000"/>
-                </a:solidFill>
-                <a:latin typeface="Times New Roman"/>
-                <a:ea typeface="Times New Roman"/>
-                <a:cs typeface="Times New Roman"/>
-              </a:rPr>
-              <a:t>МУНИЦИПАЛЬНОЕ БЮДЖЕТНОЕ ОБЩЕОБРАЗОВАТЕЛЬНОЕ УЧРЕЖДЕНИЕ «СРЕДНЯЯ ОБЩЕОБРАЗОВАТЕЛЬНАЯ ШКОЛА №135» ИМ. АКАДЕМИКА Б.В. ЛИТВИНОВА</a:t>
-            </a:r>
-            <a:endParaRPr sz="1600"/>
-          </a:p>
-        </p:txBody>
-      </p:sp>
-      <p:sp>
-        <p:nvSpPr>
-          <p:cNvPr id="2098130432" name="Подзаголовок 2"/>
-          <p:cNvSpPr>
-            <a:spLocks noGrp="1"/>
-          </p:cNvSpPr>
-          <p:nvPr>
-            <p:ph type="subTitle" idx="1"/>
-          </p:nvPr>
-        </p:nvSpPr>
-        <p:spPr bwMode="auto">
-          <a:xfrm>
-            <a:off x="48125" y="1971675"/>
-            <a:ext cx="12048564" cy="2329260"/>
-          </a:xfrm>
-        </p:spPr>
-        <p:txBody>
-          <a:bodyPr vertOverflow="overflow" horzOverflow="overflow" vert="horz" wrap="square" lIns="91440" tIns="45720" rIns="91440" bIns="45720" numCol="1" spcCol="0" rtlCol="0" fromWordArt="0" anchor="t" anchorCtr="0" forceAA="0" compatLnSpc="0">
-            <a:normAutofit/>
-          </a:bodyPr>
-          <a:lstStyle/>
-          <a:p>
-            <a:pPr>
-              <a:defRPr/>
-            </a:pPr>
-            <a:r>
-              <a:rPr sz="2400" b="1" i="0" u="none" dirty="0" err="1">
-                <a:solidFill>
-                  <a:srgbClr val="000000"/>
-                </a:solidFill>
-                <a:latin typeface="Times New Roman"/>
-                <a:ea typeface="Times New Roman"/>
-                <a:cs typeface="Times New Roman"/>
-              </a:rPr>
-              <a:t>Индивидуальный</a:t>
-            </a:r>
-            <a:r>
-              <a:rPr sz="2400" b="1" i="0" u="none" dirty="0">
-                <a:solidFill>
-                  <a:srgbClr val="000000"/>
-                </a:solidFill>
-                <a:latin typeface="Times New Roman"/>
-                <a:ea typeface="Times New Roman"/>
-                <a:cs typeface="Times New Roman"/>
-              </a:rPr>
-              <a:t> </a:t>
-            </a:r>
-            <a:r>
-              <a:rPr sz="2400" b="1" i="0" u="none" dirty="0" err="1">
-                <a:solidFill>
-                  <a:srgbClr val="000000"/>
-                </a:solidFill>
-                <a:latin typeface="Times New Roman"/>
-                <a:ea typeface="Times New Roman"/>
-                <a:cs typeface="Times New Roman"/>
-              </a:rPr>
-              <a:t>проект</a:t>
-            </a:r>
-            <a:endParaRPr sz="2400" dirty="0"/>
-          </a:p>
-          <a:p>
-            <a:pPr>
-              <a:defRPr/>
-            </a:pPr>
-            <a:r>
-              <a:rPr sz="2400" b="0" i="0" u="none" dirty="0" err="1">
-                <a:solidFill>
-                  <a:srgbClr val="000000"/>
-                </a:solidFill>
-                <a:latin typeface="Times New Roman"/>
-                <a:ea typeface="Times New Roman"/>
-                <a:cs typeface="Times New Roman"/>
-              </a:rPr>
-              <a:t>Тип</a:t>
-            </a:r>
-            <a:r>
-              <a:rPr sz="2400" b="0" i="0" u="none" dirty="0">
-                <a:solidFill>
-                  <a:srgbClr val="000000"/>
-                </a:solidFill>
-                <a:latin typeface="Times New Roman"/>
-                <a:ea typeface="Times New Roman"/>
-                <a:cs typeface="Times New Roman"/>
-              </a:rPr>
-              <a:t> </a:t>
-            </a:r>
-            <a:r>
-              <a:rPr sz="2400" b="0" i="0" u="none" dirty="0" err="1">
-                <a:solidFill>
-                  <a:srgbClr val="000000"/>
-                </a:solidFill>
-                <a:latin typeface="Times New Roman"/>
-                <a:ea typeface="Times New Roman"/>
-                <a:cs typeface="Times New Roman"/>
-              </a:rPr>
-              <a:t>проекта</a:t>
-            </a:r>
-            <a:r>
-              <a:rPr sz="2400" b="0" i="0" u="none" dirty="0">
-                <a:solidFill>
-                  <a:srgbClr val="000000"/>
-                </a:solidFill>
-                <a:latin typeface="Times New Roman"/>
-                <a:ea typeface="Times New Roman"/>
-                <a:cs typeface="Times New Roman"/>
-              </a:rPr>
-              <a:t>: </a:t>
-            </a:r>
-            <a:r>
-              <a:rPr sz="2400" b="0" i="0" u="none" dirty="0" err="1">
-                <a:solidFill>
-                  <a:srgbClr val="000000"/>
-                </a:solidFill>
-                <a:latin typeface="Times New Roman"/>
-                <a:ea typeface="Times New Roman"/>
-                <a:cs typeface="Times New Roman"/>
-              </a:rPr>
-              <a:t>социальный</a:t>
-            </a:r>
-            <a:endParaRPr sz="2400" dirty="0"/>
-          </a:p>
-          <a:p>
-            <a:pPr>
-              <a:defRPr/>
-            </a:pPr>
-            <a:r>
-              <a:rPr sz="2400" b="0" i="0" u="none" dirty="0" err="1">
-                <a:solidFill>
-                  <a:srgbClr val="000000"/>
-                </a:solidFill>
-                <a:latin typeface="Times New Roman"/>
-                <a:ea typeface="Times New Roman"/>
-                <a:cs typeface="Times New Roman"/>
-              </a:rPr>
-              <a:t>Тема</a:t>
-            </a:r>
-            <a:r>
-              <a:rPr sz="2400" b="0" i="0" u="none" dirty="0">
-                <a:solidFill>
-                  <a:srgbClr val="000000"/>
-                </a:solidFill>
-                <a:latin typeface="Times New Roman"/>
-                <a:ea typeface="Times New Roman"/>
-                <a:cs typeface="Times New Roman"/>
-              </a:rPr>
-              <a:t> </a:t>
-            </a:r>
-            <a:r>
-              <a:rPr sz="2400" b="0" i="0" u="none" dirty="0" err="1">
-                <a:solidFill>
-                  <a:srgbClr val="000000"/>
-                </a:solidFill>
-                <a:latin typeface="Times New Roman"/>
-                <a:ea typeface="Times New Roman"/>
-                <a:cs typeface="Times New Roman"/>
-              </a:rPr>
-              <a:t>проекта</a:t>
-            </a:r>
-            <a:endParaRPr sz="2400" dirty="0"/>
-          </a:p>
-          <a:p>
-            <a:pPr>
-              <a:defRPr/>
-            </a:pPr>
-            <a:r>
-              <a:rPr sz="2400" b="1" i="0" u="none" dirty="0">
-                <a:solidFill>
-                  <a:srgbClr val="000000"/>
-                </a:solidFill>
-                <a:latin typeface="Times New Roman"/>
-                <a:ea typeface="Times New Roman"/>
-                <a:cs typeface="Times New Roman"/>
-              </a:rPr>
-              <a:t>«</a:t>
-            </a:r>
-            <a:r>
-              <a:rPr lang="ru-RU" sz="2400" b="1" i="0" u="none" dirty="0">
-                <a:solidFill>
-                  <a:srgbClr val="000000"/>
-                </a:solidFill>
-                <a:latin typeface="Times New Roman"/>
-                <a:ea typeface="Times New Roman"/>
-                <a:cs typeface="Times New Roman"/>
-              </a:rPr>
-              <a:t>Сайт </a:t>
-            </a:r>
-            <a:r>
-              <a:rPr sz="2400" b="1" i="0" u="none" dirty="0" err="1">
-                <a:solidFill>
-                  <a:srgbClr val="000000"/>
-                </a:solidFill>
-                <a:latin typeface="Times New Roman"/>
-                <a:ea typeface="Times New Roman"/>
-                <a:cs typeface="Times New Roman"/>
-              </a:rPr>
-              <a:t>для</a:t>
-            </a:r>
-            <a:r>
-              <a:rPr sz="2400" b="1" i="0" u="none" dirty="0">
-                <a:solidFill>
-                  <a:srgbClr val="000000"/>
-                </a:solidFill>
-                <a:latin typeface="Times New Roman"/>
-                <a:ea typeface="Times New Roman"/>
-                <a:cs typeface="Times New Roman"/>
-              </a:rPr>
-              <a:t> </a:t>
-            </a:r>
-            <a:r>
-              <a:rPr sz="2400" b="1" i="0" u="none" dirty="0" err="1">
-                <a:solidFill>
-                  <a:srgbClr val="000000"/>
-                </a:solidFill>
-                <a:latin typeface="Times New Roman"/>
-                <a:ea typeface="Times New Roman"/>
-                <a:cs typeface="Times New Roman"/>
-              </a:rPr>
-              <a:t>трудоустройства</a:t>
-            </a:r>
-            <a:r>
-              <a:rPr sz="2400" b="1" i="0" u="none" dirty="0">
-                <a:solidFill>
-                  <a:srgbClr val="000000"/>
-                </a:solidFill>
-                <a:latin typeface="Times New Roman"/>
-                <a:ea typeface="Times New Roman"/>
-                <a:cs typeface="Times New Roman"/>
-              </a:rPr>
-              <a:t> </a:t>
-            </a:r>
-            <a:r>
-              <a:rPr sz="2400" b="1" i="0" u="none" dirty="0" err="1">
-                <a:solidFill>
-                  <a:srgbClr val="000000"/>
-                </a:solidFill>
-                <a:latin typeface="Times New Roman"/>
-                <a:ea typeface="Times New Roman"/>
-                <a:cs typeface="Times New Roman"/>
-              </a:rPr>
-              <a:t>подростков</a:t>
-            </a:r>
-            <a:r>
-              <a:rPr sz="2400" b="1" i="0" u="none" dirty="0">
-                <a:solidFill>
-                  <a:srgbClr val="000000"/>
-                </a:solidFill>
-                <a:latin typeface="Times New Roman"/>
-                <a:ea typeface="Times New Roman"/>
-                <a:cs typeface="Times New Roman"/>
-              </a:rPr>
-              <a:t>»</a:t>
-            </a:r>
-            <a:endParaRPr sz="2400" dirty="0"/>
-          </a:p>
-        </p:txBody>
-      </p:sp>
-      <p:sp>
-        <p:nvSpPr>
-          <p:cNvPr id="1897952576" name="TextBox 4"/>
-          <p:cNvSpPr txBox="1"/>
-          <p:nvPr/>
-        </p:nvSpPr>
-        <p:spPr bwMode="auto">
-          <a:xfrm>
-            <a:off x="6844433" y="4235391"/>
-            <a:ext cx="5347567" cy="1077218"/>
-          </a:xfrm>
-          <a:prstGeom prst="rect">
-            <a:avLst/>
-          </a:prstGeom>
-          <a:noFill/>
-        </p:spPr>
-        <p:txBody>
-          <a:bodyPr wrap="square">
-            <a:spAutoFit/>
-          </a:bodyPr>
-          <a:lstStyle/>
-          <a:p>
-            <a:pPr>
-              <a:defRPr/>
-            </a:pPr>
-            <a:r>
-              <a:rPr sz="1600" b="0" i="0" u="none" dirty="0" err="1">
-                <a:solidFill>
-                  <a:srgbClr val="000000"/>
-                </a:solidFill>
-                <a:latin typeface="Times New Roman"/>
-                <a:ea typeface="Times New Roman"/>
-                <a:cs typeface="Times New Roman"/>
-              </a:rPr>
-              <a:t>Автор</a:t>
-            </a:r>
-            <a:r>
-              <a:rPr sz="1600" b="0" i="0" u="none" dirty="0">
-                <a:solidFill>
-                  <a:srgbClr val="000000"/>
-                </a:solidFill>
-                <a:latin typeface="Times New Roman"/>
-                <a:ea typeface="Times New Roman"/>
-                <a:cs typeface="Times New Roman"/>
-              </a:rPr>
-              <a:t> </a:t>
-            </a:r>
-            <a:r>
-              <a:rPr sz="1600" b="0" i="0" u="none" dirty="0" err="1">
-                <a:solidFill>
-                  <a:srgbClr val="000000"/>
-                </a:solidFill>
-                <a:latin typeface="Times New Roman"/>
-                <a:ea typeface="Times New Roman"/>
-                <a:cs typeface="Times New Roman"/>
-              </a:rPr>
-              <a:t>проекта</a:t>
-            </a:r>
-            <a:r>
-              <a:rPr sz="1600" b="0" i="0" u="none" dirty="0">
-                <a:solidFill>
-                  <a:srgbClr val="000000"/>
-                </a:solidFill>
-                <a:latin typeface="Times New Roman"/>
-                <a:ea typeface="Times New Roman"/>
-                <a:cs typeface="Times New Roman"/>
-              </a:rPr>
-              <a:t>: Сукневич Виталий</a:t>
-            </a:r>
-            <a:endParaRPr sz="1600" dirty="0"/>
-          </a:p>
-          <a:p>
-            <a:pPr>
-              <a:defRPr/>
-            </a:pPr>
-            <a:r>
-              <a:rPr sz="1600" b="0" i="0" u="none" dirty="0" err="1">
-                <a:solidFill>
-                  <a:srgbClr val="000000"/>
-                </a:solidFill>
-                <a:latin typeface="Times New Roman"/>
-                <a:ea typeface="Times New Roman"/>
-                <a:cs typeface="Times New Roman"/>
-              </a:rPr>
-              <a:t>Ученик</a:t>
-            </a:r>
-            <a:r>
-              <a:rPr sz="1600" b="0" i="0" u="none" dirty="0">
-                <a:solidFill>
-                  <a:srgbClr val="000000"/>
-                </a:solidFill>
-                <a:latin typeface="Times New Roman"/>
-                <a:ea typeface="Times New Roman"/>
-                <a:cs typeface="Times New Roman"/>
-              </a:rPr>
-              <a:t> </a:t>
-            </a:r>
-            <a:r>
-              <a:rPr lang="ru-RU" sz="1600" b="0" i="0" u="none" dirty="0">
-                <a:solidFill>
-                  <a:srgbClr val="000000"/>
-                </a:solidFill>
-                <a:latin typeface="Times New Roman"/>
-                <a:ea typeface="Times New Roman"/>
-                <a:cs typeface="Times New Roman"/>
-              </a:rPr>
-              <a:t>10</a:t>
-            </a:r>
-            <a:r>
-              <a:rPr sz="1600" b="0" i="0" u="none" dirty="0">
-                <a:solidFill>
-                  <a:srgbClr val="000000"/>
-                </a:solidFill>
-                <a:latin typeface="Times New Roman"/>
-                <a:ea typeface="Times New Roman"/>
-                <a:cs typeface="Times New Roman"/>
-              </a:rPr>
-              <a:t> «А» </a:t>
-            </a:r>
-            <a:r>
-              <a:rPr sz="1600" b="0" i="0" u="none" dirty="0" err="1">
-                <a:solidFill>
-                  <a:srgbClr val="000000"/>
-                </a:solidFill>
-                <a:latin typeface="Times New Roman"/>
-                <a:ea typeface="Times New Roman"/>
-                <a:cs typeface="Times New Roman"/>
-              </a:rPr>
-              <a:t>класса</a:t>
-            </a:r>
-            <a:endParaRPr sz="1600" dirty="0"/>
-          </a:p>
-          <a:p>
-            <a:pPr>
-              <a:defRPr/>
-            </a:pPr>
-            <a:r>
-              <a:rPr sz="1600" b="0" i="0" u="none" dirty="0" err="1">
-                <a:solidFill>
-                  <a:srgbClr val="000000"/>
-                </a:solidFill>
-                <a:latin typeface="Times New Roman"/>
-                <a:ea typeface="Times New Roman"/>
-                <a:cs typeface="Times New Roman"/>
-              </a:rPr>
-              <a:t>Наставник</a:t>
-            </a:r>
-            <a:r>
-              <a:rPr sz="1600" b="0" i="0" u="none" dirty="0">
-                <a:solidFill>
-                  <a:srgbClr val="000000"/>
-                </a:solidFill>
-                <a:latin typeface="Times New Roman"/>
-                <a:ea typeface="Times New Roman"/>
-                <a:cs typeface="Times New Roman"/>
-              </a:rPr>
-              <a:t> </a:t>
-            </a:r>
-            <a:r>
-              <a:rPr sz="1600" b="0" i="0" u="none" dirty="0" err="1">
-                <a:solidFill>
-                  <a:srgbClr val="000000"/>
-                </a:solidFill>
-                <a:latin typeface="Times New Roman"/>
-                <a:ea typeface="Times New Roman"/>
-                <a:cs typeface="Times New Roman"/>
-              </a:rPr>
-              <a:t>проекта</a:t>
-            </a:r>
-            <a:r>
-              <a:rPr sz="1600" b="0" i="0" u="none" dirty="0">
-                <a:solidFill>
-                  <a:srgbClr val="000000"/>
-                </a:solidFill>
-                <a:latin typeface="Times New Roman"/>
-                <a:ea typeface="Times New Roman"/>
-                <a:cs typeface="Times New Roman"/>
-              </a:rPr>
-              <a:t>:</a:t>
-            </a:r>
-            <a:r>
-              <a:rPr lang="ru-RU" sz="1600" b="0" i="0" u="none" dirty="0">
-                <a:solidFill>
-                  <a:srgbClr val="000000"/>
-                </a:solidFill>
-                <a:latin typeface="Times New Roman"/>
-                <a:ea typeface="Times New Roman"/>
-                <a:cs typeface="Times New Roman"/>
-              </a:rPr>
-              <a:t> </a:t>
-            </a:r>
-            <a:r>
-              <a:rPr lang="ru-RU" sz="1600" b="0" i="0" u="none" dirty="0" err="1">
-                <a:solidFill>
-                  <a:srgbClr val="000000"/>
-                </a:solidFill>
-                <a:latin typeface="Times New Roman"/>
-                <a:ea typeface="Times New Roman"/>
-                <a:cs typeface="Times New Roman"/>
-              </a:rPr>
-              <a:t>Сагайдачная</a:t>
-            </a:r>
-            <a:r>
-              <a:rPr lang="ru-RU" sz="1600" b="0" i="0" u="none" dirty="0">
-                <a:solidFill>
-                  <a:srgbClr val="000000"/>
-                </a:solidFill>
-                <a:latin typeface="Times New Roman"/>
-                <a:ea typeface="Times New Roman"/>
-                <a:cs typeface="Times New Roman"/>
-              </a:rPr>
-              <a:t> Полина Вячеславовна</a:t>
-            </a:r>
-            <a:endParaRPr lang="en-US" sz="1600" b="0" i="0" u="none" dirty="0">
-              <a:solidFill>
-                <a:srgbClr val="000000"/>
-              </a:solidFill>
-              <a:latin typeface="Times New Roman"/>
-              <a:ea typeface="Times New Roman"/>
-              <a:cs typeface="Times New Roman"/>
-            </a:endParaRPr>
-          </a:p>
-          <a:p>
-            <a:pPr>
-              <a:defRPr/>
-            </a:pPr>
-            <a:endParaRPr sz="1600" dirty="0"/>
-          </a:p>
-        </p:txBody>
-      </p:sp>
-      <p:sp>
-        <p:nvSpPr>
-          <p:cNvPr id="671362919" name=" 671362918"/>
-          <p:cNvSpPr/>
-          <p:nvPr/>
-        </p:nvSpPr>
-        <p:spPr bwMode="auto">
-          <a:xfrm>
-            <a:off x="4382474" y="6025514"/>
-            <a:ext cx="3564509" cy="579479"/>
-          </a:xfrm>
-        </p:spPr>
-        <p:txBody>
-          <a:bodyPr rot="0" spcFirstLastPara="0" vertOverflow="overflow" horzOverflow="overflow" vert="horz" wrap="square" lIns="91440" tIns="45720" rIns="91440" bIns="45720" numCol="1" spcCol="0" rtlCol="0" fromWordArt="0" anchor="t" anchorCtr="0" forceAA="0" compatLnSpc="1">
-            <a:prstTxWarp prst="textNoShape">
-              <a:avLst/>
-            </a:prstTxWarp>
-            <a:spAutoFit/>
-          </a:bodyPr>
-          <a:lstStyle/>
-          <a:p>
-            <a:pPr algn="ctr">
-              <a:defRPr/>
-            </a:pPr>
-            <a:r>
-              <a:rPr sz="1600" b="0" i="0" u="none" dirty="0">
-                <a:solidFill>
-                  <a:srgbClr val="000000"/>
-                </a:solidFill>
-                <a:latin typeface="Times New Roman"/>
-                <a:ea typeface="Times New Roman"/>
-                <a:cs typeface="Times New Roman"/>
-              </a:rPr>
-              <a:t>Г. </a:t>
-            </a:r>
-            <a:r>
-              <a:rPr sz="1600" b="0" i="0" u="none" dirty="0" err="1">
-                <a:solidFill>
-                  <a:srgbClr val="000000"/>
-                </a:solidFill>
-                <a:latin typeface="Times New Roman"/>
-                <a:ea typeface="Times New Roman"/>
-                <a:cs typeface="Times New Roman"/>
-              </a:rPr>
-              <a:t>Снежинск</a:t>
-            </a:r>
-            <a:endParaRPr sz="1600" dirty="0"/>
-          </a:p>
-          <a:p>
-            <a:pPr algn="ctr">
-              <a:defRPr/>
-            </a:pPr>
-            <a:r>
-              <a:rPr sz="1600" b="0" i="0" u="none" dirty="0">
-                <a:solidFill>
-                  <a:srgbClr val="000000"/>
-                </a:solidFill>
-                <a:latin typeface="Times New Roman"/>
-                <a:ea typeface="Times New Roman"/>
-                <a:cs typeface="Times New Roman"/>
-              </a:rPr>
-              <a:t>202</a:t>
-            </a:r>
-            <a:r>
-              <a:rPr lang="ru-RU" sz="1600" b="0" i="0" u="none" dirty="0">
-                <a:solidFill>
-                  <a:srgbClr val="000000"/>
-                </a:solidFill>
-                <a:latin typeface="Times New Roman"/>
-                <a:ea typeface="Times New Roman"/>
-                <a:cs typeface="Times New Roman"/>
-              </a:rPr>
-              <a:t>5</a:t>
-            </a:r>
-            <a:r>
-              <a:rPr sz="1600" b="0" i="0" u="none" dirty="0">
-                <a:solidFill>
-                  <a:srgbClr val="000000"/>
-                </a:solidFill>
-                <a:latin typeface="Times New Roman"/>
-                <a:ea typeface="Times New Roman"/>
-                <a:cs typeface="Times New Roman"/>
-              </a:rPr>
-              <a:t> г.</a:t>
-            </a:r>
-            <a:endParaRPr sz="1600" dirty="0"/>
-          </a:p>
-        </p:txBody>
-      </p:sp>
-    </p:spTree>
-    <p:extLst>
-      <p:ext uri="{BB962C8B-B14F-4D97-AF65-F5344CB8AC3E}">
-        <p14:creationId xmlns:p14="http://schemas.microsoft.com/office/powerpoint/2010/main" val="1924461028"/>
-      </p:ext>
-    </p:extLst>
   </p:cSld>
   <p:clrMapOvr>
     <a:masterClrMapping/>
@@ -5006,7 +4393,7 @@
         </p:blipFill>
         <p:spPr bwMode="auto">
           <a:xfrm>
-            <a:off x="3098202" y="2474259"/>
+            <a:off x="6053627" y="1575625"/>
             <a:ext cx="5760000" cy="3836437"/>
           </a:xfrm>
           <a:prstGeom prst="rect">
@@ -5059,8 +4446,8 @@
         </p:nvSpPr>
         <p:spPr bwMode="auto">
           <a:xfrm>
-            <a:off x="853441" y="1268977"/>
-            <a:ext cx="10388300" cy="1015663"/>
+            <a:off x="490835" y="1221680"/>
+            <a:ext cx="5184752" cy="5016758"/>
           </a:xfrm>
           <a:prstGeom prst="rect">
             <a:avLst/>
@@ -5076,14 +4463,34 @@
               <a:defRPr/>
             </a:pPr>
             <a:r>
-              <a:rPr lang="ru-RU" sz="2000">
+              <a:rPr lang="ru-RU" sz="2000" dirty="0">
                 <a:latin typeface="Times New Roman"/>
                 <a:ea typeface="Times New Roman"/>
                 <a:cs typeface="Times New Roman"/>
               </a:rPr>
-              <a:t>Подростковый возраст является наиболее оптимальным для развития системы ценностей, так как это период самоутверждения, активного развития социальных интересов и жизненных идеалов.</a:t>
-            </a:r>
-            <a:endParaRPr/>
+              <a:t>Подростковый возраст является наиболее оптимальным для развития системы ценностей, так как это период самоутверждения, активного развития социальных интересов и жизненных идеалов</a:t>
+            </a:r>
+            <a:r>
+              <a:rPr lang="ru-RU" sz="2000" dirty="0" smtClean="0">
+                <a:latin typeface="Times New Roman"/>
+                <a:ea typeface="Times New Roman"/>
+                <a:cs typeface="Times New Roman"/>
+              </a:rPr>
+              <a:t>. </a:t>
+            </a:r>
+            <a:r>
+              <a:rPr lang="ru-RU" sz="2000" dirty="0">
+                <a:latin typeface="Times New Roman"/>
+                <a:ea typeface="Times New Roman"/>
+                <a:cs typeface="Times New Roman"/>
+              </a:rPr>
+              <a:t>В современном мире подростки все раньше начинают задумываться о финансовой независимости и первом трудовом опыте. Если раньше работа для школьников воспринималась как редкая подработка «на лето», то сегодня это устойчивый тренд, поддерживаемый государством, бизнесом и цифровыми платформами. Создание персонального сайта для трудоустройства подростка становится  насущной необходимостью.</a:t>
+            </a:r>
+            <a:endParaRPr sz="2000" dirty="0">
+              <a:latin typeface="Times New Roman"/>
+              <a:ea typeface="Times New Roman"/>
+              <a:cs typeface="Times New Roman"/>
+            </a:endParaRPr>
           </a:p>
         </p:txBody>
       </p:sp>
@@ -5158,29 +4565,34 @@
         </p:nvSpPr>
         <p:spPr bwMode="auto"/>
         <p:txBody>
-          <a:bodyPr/>
+          <a:bodyPr>
+            <a:normAutofit/>
+          </a:bodyPr>
           <a:lstStyle/>
           <a:p>
             <a:pPr marL="0" indent="0">
-              <a:buNone/>
-              <a:defRPr/>
-            </a:pPr>
-            <a:r>
-              <a:rPr lang="ru-RU">
+              <a:lnSpc>
+                <a:spcPct val="150000"/>
+              </a:lnSpc>
+              <a:buNone/>
+              <a:defRPr/>
+            </a:pPr>
+            <a:r>
+              <a:rPr lang="ru-RU" dirty="0">
                 <a:latin typeface="Times New Roman"/>
                 <a:cs typeface="Times New Roman"/>
               </a:rPr>
               <a:t>1.</a:t>
             </a:r>
             <a:r>
-              <a:rPr lang="en-US">
+              <a:rPr lang="en-US" dirty="0">
                 <a:latin typeface="Times New Roman"/>
                 <a:cs typeface="Times New Roman"/>
               </a:rPr>
               <a:t> </a:t>
             </a:r>
             <a:r>
-              <a:rPr lang="ru-RU">
+              <a:rPr lang="ru-RU" dirty="0">
                 <a:latin typeface="Times New Roman"/>
                 <a:cs typeface="Times New Roman"/>
               </a:rPr>
@@ -5189,38 +4601,41 @@
           </a:p>
           <a:p>
             <a:pPr marL="0" indent="0">
-              <a:buNone/>
-              <a:defRPr/>
-            </a:pPr>
-            <a:r>
-              <a:rPr lang="ru-RU">
+              <a:lnSpc>
+                <a:spcPct val="150000"/>
+              </a:lnSpc>
+              <a:buNone/>
+              <a:defRPr/>
+            </a:pPr>
+            <a:r>
+              <a:rPr lang="ru-RU" dirty="0">
                 <a:latin typeface="Times New Roman"/>
                 <a:cs typeface="Times New Roman"/>
               </a:rPr>
               <a:t>2. Знаете ли как трудоустроится  на работу?</a:t>
             </a:r>
             <a:br>
-              <a:rPr lang="ru-RU">
+              <a:rPr lang="ru-RU" dirty="0">
                 <a:latin typeface="Times New Roman"/>
                 <a:cs typeface="Times New Roman"/>
               </a:rPr>
             </a:br>
             <a:r>
-              <a:rPr lang="ru-RU">
+              <a:rPr lang="ru-RU" dirty="0">
                 <a:latin typeface="Times New Roman"/>
                 <a:cs typeface="Times New Roman"/>
               </a:rPr>
               <a:t>3.</a:t>
             </a:r>
             <a:r>
-              <a:rPr lang="en-US">
+              <a:rPr lang="en-US" dirty="0">
                 <a:latin typeface="Times New Roman"/>
                 <a:cs typeface="Times New Roman"/>
               </a:rPr>
               <a:t> </a:t>
             </a:r>
             <a:r>
-              <a:rPr lang="ru-RU">
+              <a:rPr lang="ru-RU" dirty="0">
                 <a:latin typeface="Times New Roman"/>
                 <a:cs typeface="Times New Roman"/>
               </a:rPr>
@@ -5229,72 +4644,75 @@
           </a:p>
           <a:p>
             <a:pPr marL="0" indent="0">
-              <a:buNone/>
-              <a:defRPr/>
-            </a:pPr>
-            <a:r>
-              <a:rPr lang="ru-RU">
+              <a:lnSpc>
+                <a:spcPct val="150000"/>
+              </a:lnSpc>
+              <a:buNone/>
+              <a:defRPr/>
+            </a:pPr>
+            <a:r>
+              <a:rPr lang="ru-RU" dirty="0">
                 <a:latin typeface="Times New Roman"/>
                 <a:cs typeface="Times New Roman"/>
               </a:rPr>
               <a:t>4.</a:t>
             </a:r>
             <a:r>
-              <a:rPr lang="en-US">
+              <a:rPr lang="en-US" dirty="0">
                 <a:latin typeface="Times New Roman"/>
                 <a:cs typeface="Times New Roman"/>
               </a:rPr>
               <a:t> </a:t>
             </a:r>
             <a:r>
-              <a:rPr lang="ru-RU">
+              <a:rPr lang="ru-RU" dirty="0">
                 <a:latin typeface="Times New Roman"/>
                 <a:cs typeface="Times New Roman"/>
               </a:rPr>
               <a:t>Кто занимается трудоустройством подростков?</a:t>
             </a:r>
-            <a:endParaRPr/>
+            <a:endParaRPr dirty="0"/>
           </a:p>
           <a:p>
             <a:pPr marL="0" indent="0">
-              <a:buNone/>
-              <a:defRPr/>
-            </a:pPr>
-            <a:r>
-              <a:rPr lang="ru-RU">
+              <a:lnSpc>
+                <a:spcPct val="150000"/>
+              </a:lnSpc>
+              <a:buNone/>
+              <a:defRPr/>
+            </a:pPr>
+            <a:r>
+              <a:rPr lang="ru-RU" dirty="0">
                 <a:latin typeface="Times New Roman"/>
                 <a:cs typeface="Times New Roman"/>
               </a:rPr>
               <a:t>5.</a:t>
             </a:r>
             <a:r>
-              <a:rPr lang="en-US">
+              <a:rPr lang="en-US" dirty="0">
                 <a:latin typeface="Times New Roman"/>
                 <a:cs typeface="Times New Roman"/>
               </a:rPr>
               <a:t> </a:t>
             </a:r>
             <a:r>
-              <a:rPr lang="ru-RU">
+              <a:rPr lang="ru-RU" dirty="0">
                 <a:latin typeface="Times New Roman"/>
                 <a:cs typeface="Times New Roman"/>
               </a:rPr>
               <a:t>Куда обратиться для трудоустройства?</a:t>
             </a:r>
-            <a:endParaRPr/>
+            <a:endParaRPr dirty="0"/>
           </a:p>
           <a:p>
             <a:pPr marL="0" indent="0">
-              <a:buNone/>
-              <a:defRPr/>
-            </a:pPr>
-            <a:br>
-              <a:rPr lang="ru-RU">
-                <a:latin typeface="Times New Roman"/>
-                <a:cs typeface="Times New Roman"/>
-              </a:rPr>
-            </a:br>
-            <a:endParaRPr lang="ru-RU">
+              <a:lnSpc>
+                <a:spcPct val="150000"/>
+              </a:lnSpc>
+              <a:buNone/>
+              <a:defRPr/>
+            </a:pPr>
+            <a:endParaRPr lang="ru-RU" dirty="0">
               <a:latin typeface="Times New Roman"/>
               <a:cs typeface="Times New Roman"/>
             </a:endParaRPr>
@@ -5583,7 +5001,23 @@
                 <a:ea typeface="Times New Roman"/>
                 <a:cs typeface="Times New Roman"/>
               </a:rPr>
-              <a:t>Создание сайта в интернете для  помощи в трудоустройстве подростков.</a:t>
+              <a:t>Создание </a:t>
+            </a:r>
+            <a:r>
+              <a:rPr lang="ru-RU" sz="2800" dirty="0" smtClean="0">
+                <a:latin typeface="Times New Roman"/>
+                <a:ea typeface="Times New Roman"/>
+                <a:cs typeface="Times New Roman"/>
+              </a:rPr>
+              <a:t>сайта </a:t>
+            </a:r>
+            <a:r>
+              <a:rPr lang="ru-RU" sz="2800" dirty="0">
+                <a:latin typeface="Times New Roman"/>
+                <a:ea typeface="Times New Roman"/>
+                <a:cs typeface="Times New Roman"/>
+              </a:rPr>
+              <a:t>для  помощи в трудоустройстве подростков.</a:t>
             </a:r>
           </a:p>
           <a:p>
@@ -5591,13 +5025,32 @@
               <a:buNone/>
               <a:defRPr/>
             </a:pPr>
+            <a:endParaRPr lang="ru-RU" sz="2800" b="1" dirty="0" smtClean="0">
+              <a:latin typeface="Times New Roman"/>
+              <a:ea typeface="Times New Roman"/>
+              <a:cs typeface="Times New Roman"/>
+            </a:endParaRPr>
+          </a:p>
+          <a:p>
+            <a:pPr marL="0" indent="0" algn="just">
+              <a:buNone/>
+              <a:defRPr/>
+            </a:pPr>
+            <a:r>
+              <a:rPr lang="ru-RU" sz="2800" b="1" dirty="0" smtClean="0">
+                <a:latin typeface="Times New Roman"/>
+                <a:ea typeface="Times New Roman"/>
+                <a:cs typeface="Times New Roman"/>
+              </a:rPr>
+              <a:t>Задачи</a:t>
+            </a:r>
             <a:r>
               <a:rPr lang="ru-RU" sz="2800" b="1" dirty="0">
                 <a:latin typeface="Times New Roman"/>
                 <a:ea typeface="Times New Roman"/>
                 <a:cs typeface="Times New Roman"/>
               </a:rPr>
-              <a:t>Задачи: </a:t>
+              <a:t>: </a:t>
             </a:r>
             <a:endParaRPr dirty="0"/>
           </a:p>
@@ -5838,13 +5291,13 @@
               <a:defRPr/>
             </a:pPr>
             <a:r>
-              <a:rPr lang="ru-RU" sz="2800" b="1">
+              <a:rPr lang="ru-RU" sz="2800" b="1" dirty="0">
                 <a:latin typeface="Times New Roman"/>
                 <a:cs typeface="Times New Roman"/>
               </a:rPr>
               <a:t>Трудовые правила и ограничения</a:t>
             </a:r>
-            <a:endParaRPr/>
+            <a:endParaRPr dirty="0"/>
           </a:p>
         </p:txBody>
       </p:sp>
@@ -5856,8 +5309,8 @@
         </p:nvSpPr>
         <p:spPr bwMode="auto">
           <a:xfrm>
-            <a:off x="256032" y="1763477"/>
-            <a:ext cx="11695176" cy="2677656"/>
+            <a:off x="-138105" y="1353574"/>
+            <a:ext cx="11695176" cy="2308324"/>
           </a:xfrm>
           <a:prstGeom prst="rect">
             <a:avLst/>
@@ -5873,50 +5326,180 @@
               <a:defRPr/>
             </a:pPr>
             <a:r>
-              <a:rPr lang="ru-RU" sz="2400">
+              <a:rPr lang="ru-RU" sz="2400" dirty="0">
                 <a:latin typeface="Times New Roman"/>
                 <a:cs typeface="Times New Roman"/>
               </a:rPr>
               <a:t>	Согласно Закону, подросток может работать с 14-ти лет.</a:t>
             </a:r>
-            <a:endParaRPr/>
-          </a:p>
-          <a:p>
-            <a:pPr>
-              <a:defRPr/>
-            </a:pPr>
-            <a:endParaRPr lang="ru-RU" sz="2400">
+            <a:endParaRPr dirty="0"/>
+          </a:p>
+          <a:p>
+            <a:pPr>
+              <a:defRPr/>
+            </a:pPr>
+            <a:endParaRPr lang="ru-RU" sz="2400" dirty="0">
               <a:latin typeface="Times New Roman"/>
               <a:cs typeface="Times New Roman"/>
             </a:endParaRPr>
           </a:p>
           <a:p>
             <a:pPr>
-              <a:defRPr/>
-            </a:pPr>
-            <a:endParaRPr lang="ru-RU" sz="2400">
+              <a:lnSpc>
+                <a:spcPct val="150000"/>
+              </a:lnSpc>
+              <a:defRPr/>
+            </a:pPr>
+            <a:r>
+              <a:rPr lang="ru-RU" sz="2400" dirty="0" smtClean="0">
+                <a:latin typeface="Times New Roman"/>
+                <a:cs typeface="Times New Roman"/>
+              </a:rPr>
+              <a:t>­</a:t>
+            </a:r>
+            <a:r>
+              <a:rPr lang="ru-RU" sz="2400" dirty="0">
+                <a:latin typeface="Times New Roman"/>
+                <a:cs typeface="Times New Roman"/>
+              </a:rPr>
+              <a:t>	</a:t>
+            </a:r>
+            <a:r>
+              <a:rPr lang="ru-RU" sz="2400" b="1" dirty="0">
+                <a:latin typeface="Times New Roman"/>
+                <a:cs typeface="Times New Roman"/>
+              </a:rPr>
+              <a:t>Продолжительность рабочего времени</a:t>
+            </a:r>
+            <a:r>
+              <a:rPr lang="ru-RU" sz="2400" b="1" dirty="0" smtClean="0">
+                <a:latin typeface="Times New Roman"/>
+                <a:cs typeface="Times New Roman"/>
+              </a:rPr>
+              <a:t>:</a:t>
+            </a:r>
+            <a:endParaRPr lang="ru-RU" sz="2400" dirty="0">
               <a:latin typeface="Times New Roman"/>
               <a:cs typeface="Times New Roman"/>
             </a:endParaRPr>
           </a:p>
           <a:p>
-            <a:pPr>
-              <a:defRPr/>
-            </a:pPr>
-            <a:r>
-              <a:rPr lang="ru-RU" sz="2400">
-                <a:latin typeface="Times New Roman"/>
-                <a:cs typeface="Times New Roman"/>
-              </a:rPr>
-              <a:t>­	Продолжительность рабочего времени:</a:t>
-            </a:r>
-            <a:endParaRPr/>
-          </a:p>
-          <a:p>
-            <a:pPr>
-              <a:defRPr/>
-            </a:pPr>
-            <a:endParaRPr lang="ru-RU" sz="2400">
+            <a:pPr lvl="0">
+              <a:lnSpc>
+                <a:spcPct val="150000"/>
+              </a:lnSpc>
+              <a:defRPr/>
+            </a:pPr>
+            <a:r>
+              <a:rPr lang="ru-RU" sz="2400" dirty="0">
+                <a:latin typeface="Times New Roman"/>
+                <a:cs typeface="Times New Roman"/>
+              </a:rPr>
+              <a:t>	- для подростков 14 - 16 лет - 5 часов в день и 24 ч в неделю;</a:t>
+            </a:r>
+            <a:endParaRPr dirty="0"/>
+          </a:p>
+          <a:p>
+            <a:pPr lvl="0">
+              <a:defRPr/>
+            </a:pPr>
+            <a:r>
+              <a:rPr lang="ru-RU" sz="2400" dirty="0">
+                <a:latin typeface="Times New Roman"/>
+                <a:cs typeface="Times New Roman"/>
+              </a:rPr>
+              <a:t>	- для подростков 16 - 18 лет -7 часов в день и 36 ч в неделю.</a:t>
+            </a:r>
+            <a:endParaRPr dirty="0"/>
+          </a:p>
+        </p:txBody>
+      </p:sp>
+      <p:sp>
+        <p:nvSpPr>
+          <p:cNvPr id="6" name="Прямоугольник 5"/>
+          <p:cNvSpPr/>
+          <p:nvPr/>
+        </p:nvSpPr>
+        <p:spPr bwMode="auto">
+          <a:xfrm>
+            <a:off x="0" y="4044836"/>
+            <a:ext cx="11612880" cy="2308324"/>
+          </a:xfrm>
+          <a:prstGeom prst="rect">
+            <a:avLst/>
+          </a:prstGeom>
+        </p:spPr>
+        <p:txBody>
+          <a:bodyPr wrap="square">
+            <a:spAutoFit/>
+          </a:bodyPr>
+          <a:lstStyle/>
+          <a:p>
+            <a:pPr>
+              <a:lnSpc>
+                <a:spcPct val="150000"/>
+              </a:lnSpc>
+              <a:defRPr/>
+            </a:pPr>
+            <a:r>
+              <a:rPr lang="ru-RU" sz="2400" dirty="0">
+                <a:latin typeface="Times New Roman"/>
+                <a:cs typeface="Times New Roman"/>
+              </a:rPr>
+              <a:t>	</a:t>
+            </a:r>
+            <a:r>
+              <a:rPr lang="ru-RU" sz="2400" b="1" dirty="0">
+                <a:latin typeface="Times New Roman"/>
+                <a:cs typeface="Times New Roman"/>
+              </a:rPr>
+              <a:t>Запрещенные</a:t>
+            </a:r>
+            <a:r>
+              <a:rPr lang="ru-RU" sz="2400" dirty="0">
+                <a:latin typeface="Times New Roman"/>
+                <a:cs typeface="Times New Roman"/>
+              </a:rPr>
+              <a:t> законодательством </a:t>
+            </a:r>
+            <a:r>
+              <a:rPr lang="ru-RU" sz="2400" b="1" dirty="0">
+                <a:latin typeface="Times New Roman"/>
+                <a:cs typeface="Times New Roman"/>
+              </a:rPr>
+              <a:t>виды работ</a:t>
+            </a:r>
+            <a:r>
+              <a:rPr lang="ru-RU" sz="2400" dirty="0">
+                <a:latin typeface="Times New Roman"/>
+                <a:cs typeface="Times New Roman"/>
+              </a:rPr>
+              <a:t>:</a:t>
+            </a:r>
+            <a:endParaRPr dirty="0"/>
+          </a:p>
+          <a:p>
+            <a:pPr lvl="0">
+              <a:lnSpc>
+                <a:spcPct val="150000"/>
+              </a:lnSpc>
+              <a:defRPr/>
+            </a:pPr>
+            <a:r>
+              <a:rPr lang="ru-RU" sz="2400" dirty="0">
+                <a:latin typeface="Times New Roman"/>
+                <a:cs typeface="Times New Roman"/>
+              </a:rPr>
+              <a:t>	- совместительство</a:t>
+            </a:r>
+            <a:r>
+              <a:rPr lang="ru-RU" sz="2400" dirty="0" smtClean="0">
+                <a:latin typeface="Times New Roman"/>
+                <a:cs typeface="Times New Roman"/>
+              </a:rPr>
+              <a:t>;</a:t>
+            </a:r>
+            <a:endParaRPr lang="ru-RU" sz="2400" dirty="0">
               <a:latin typeface="Times New Roman"/>
               <a:cs typeface="Times New Roman"/>
             </a:endParaRPr>
@@ -5926,26 +5509,59 @@
               <a:defRPr/>
             </a:pPr>
             <a:r>
-              <a:rPr lang="ru-RU" sz="2400">
-                <a:latin typeface="Times New Roman"/>
-                <a:cs typeface="Times New Roman"/>
-              </a:rPr>
-              <a:t>	- для подростков 14 - 16 лет - 5 часов в день и 24 ч в неделю;</a:t>
-            </a:r>
-            <a:endParaRPr/>
+              <a:rPr lang="ru-RU" sz="2400" dirty="0">
+                <a:latin typeface="Times New Roman"/>
+                <a:cs typeface="Times New Roman"/>
+              </a:rPr>
+              <a:t>	- на работах с вредными и опасными условиями труда</a:t>
+            </a:r>
+            <a:r>
+              <a:rPr lang="ru-RU" sz="2400" dirty="0" smtClean="0">
+                <a:latin typeface="Times New Roman"/>
+                <a:cs typeface="Times New Roman"/>
+              </a:rPr>
+              <a:t>;</a:t>
+            </a:r>
+            <a:endParaRPr lang="ru-RU" sz="2400" dirty="0">
+              <a:latin typeface="Times New Roman"/>
+              <a:cs typeface="Times New Roman"/>
+            </a:endParaRPr>
           </a:p>
           <a:p>
             <a:pPr lvl="0">
               <a:defRPr/>
             </a:pPr>
             <a:r>
-              <a:rPr lang="ru-RU" sz="2400">
-                <a:latin typeface="Times New Roman"/>
-                <a:cs typeface="Times New Roman"/>
-              </a:rPr>
-              <a:t>	- для подростков 16 - 18 лет -7 часов в день и 36 ч в неделю.</a:t>
-            </a:r>
-            <a:endParaRPr/>
+              <a:rPr lang="ru-RU" sz="2400" dirty="0">
+                <a:latin typeface="Times New Roman"/>
+                <a:cs typeface="Times New Roman"/>
+              </a:rPr>
+              <a:t>	- в религиозных учреждениях</a:t>
+            </a:r>
+            <a:r>
+              <a:rPr lang="ru-RU" sz="2400" dirty="0" smtClean="0">
+                <a:latin typeface="Times New Roman"/>
+                <a:cs typeface="Times New Roman"/>
+              </a:rPr>
+              <a:t>;</a:t>
+            </a:r>
+            <a:endParaRPr lang="ru-RU" sz="2400" dirty="0">
+              <a:latin typeface="Times New Roman"/>
+              <a:cs typeface="Times New Roman"/>
+            </a:endParaRPr>
+          </a:p>
+          <a:p>
+            <a:pPr lvl="0">
+              <a:defRPr/>
+            </a:pPr>
+            <a:r>
+              <a:rPr lang="ru-RU" sz="2400" dirty="0">
+                <a:latin typeface="Times New Roman"/>
+                <a:cs typeface="Times New Roman"/>
+              </a:rPr>
+              <a:t>	- в выходные дни, в ночное время, на подземных работах.</a:t>
+            </a:r>
+            <a:endParaRPr dirty="0"/>
           </a:p>
         </p:txBody>
       </p:sp>
@@ -5958,6 +5574,607 @@
 </file>
 
 <file path=ppt/slides/slide7.xml><?xml version="1.0" encoding="utf-8"?>
+<p:sld xmlns:a="http://schemas.openxmlformats.org/drawingml/2006/main" xmlns:r="http://schemas.openxmlformats.org/officeDocument/2006/relationships" xmlns:p="http://schemas.openxmlformats.org/presentationml/2006/main">
+  <p:cSld>
+    <p:spTree>
+      <p:nvGrpSpPr>
+        <p:cNvPr id="1" name=""/>
+        <p:cNvGrpSpPr/>
+        <p:nvPr/>
+      </p:nvGrpSpPr>
+      <p:grpSpPr>
+        <a:xfrm>
+          <a:off x="0" y="0"/>
+          <a:ext cx="0" cy="0"/>
+          <a:chOff x="0" y="0"/>
+          <a:chExt cx="0" cy="0"/>
+        </a:xfrm>
+      </p:grpSpPr>
+      <p:sp>
+        <p:nvSpPr>
+          <p:cNvPr id="2" name="Заголовок 1"/>
+          <p:cNvSpPr>
+            <a:spLocks noGrp="1"/>
+          </p:cNvSpPr>
+          <p:nvPr>
+            <p:ph type="title"/>
+          </p:nvPr>
+        </p:nvSpPr>
+        <p:spPr/>
+        <p:txBody>
+          <a:bodyPr>
+            <a:normAutofit/>
+          </a:bodyPr>
+          <a:lstStyle/>
+          <a:p>
+            <a:r>
+              <a:rPr lang="ru-RU" sz="2800" b="1" dirty="0" smtClean="0"/>
+              <a:t>Требуемые характеристики сайта  </a:t>
+            </a:r>
+            <a:endParaRPr lang="ru-RU" sz="2800" b="1" dirty="0"/>
+          </a:p>
+        </p:txBody>
+      </p:sp>
+      <p:sp>
+        <p:nvSpPr>
+          <p:cNvPr id="6" name="Text 2"/>
+          <p:cNvSpPr>
+            <a:spLocks noGrp="1"/>
+          </p:cNvSpPr>
+          <p:nvPr>
+            <p:ph idx="1"/>
+          </p:nvPr>
+        </p:nvSpPr>
+        <p:spPr>
+          <a:prstGeom prst="rect">
+            <a:avLst/>
+          </a:prstGeom>
+          <a:noFill/>
+          <a:ln/>
+        </p:spPr>
+        <p:txBody>
+          <a:bodyPr wrap="square" lIns="0" tIns="0" rIns="0" bIns="0" rtlCol="0" anchor="t">
+            <a:normAutofit/>
+          </a:bodyPr>
+          <a:lstStyle/>
+          <a:p>
+            <a:pPr marL="0" indent="0" algn="l">
+              <a:lnSpc>
+                <a:spcPct val="150000"/>
+              </a:lnSpc>
+              <a:buSzPct val="100000"/>
+              <a:buNone/>
+            </a:pPr>
+            <a:r>
+              <a:rPr lang="ru-RU" sz="2400" dirty="0" smtClean="0">
+                <a:solidFill>
+                  <a:srgbClr val="272525"/>
+                </a:solidFill>
+                <a:latin typeface="Times New Roman" panose="02020603050405020304" pitchFamily="18" charset="0"/>
+                <a:ea typeface="Inter" pitchFamily="34" charset="-122"/>
+                <a:cs typeface="Times New Roman" panose="02020603050405020304" pitchFamily="18" charset="0"/>
+              </a:rPr>
+              <a:t>1. </a:t>
+            </a:r>
+            <a:r>
+              <a:rPr lang="ru-RU" sz="2400" dirty="0">
+                <a:solidFill>
+                  <a:srgbClr val="272525"/>
+                </a:solidFill>
+                <a:latin typeface="Times New Roman" panose="02020603050405020304" pitchFamily="18" charset="0"/>
+                <a:ea typeface="Inter" pitchFamily="34" charset="-122"/>
+                <a:cs typeface="Times New Roman" panose="02020603050405020304" pitchFamily="18" charset="0"/>
+              </a:rPr>
+              <a:t>М</a:t>
+            </a:r>
+            <a:r>
+              <a:rPr lang="en-US" sz="2400" dirty="0" err="1" smtClean="0">
+                <a:solidFill>
+                  <a:srgbClr val="272525"/>
+                </a:solidFill>
+                <a:latin typeface="Times New Roman" panose="02020603050405020304" pitchFamily="18" charset="0"/>
+                <a:ea typeface="Inter" pitchFamily="34" charset="-122"/>
+                <a:cs typeface="Times New Roman" panose="02020603050405020304" pitchFamily="18" charset="0"/>
+              </a:rPr>
+              <a:t>ногостраничн</a:t>
+            </a:r>
+            <a:r>
+              <a:rPr lang="ru-RU" sz="2400" dirty="0" smtClean="0">
+                <a:solidFill>
+                  <a:srgbClr val="272525"/>
+                </a:solidFill>
+                <a:latin typeface="Times New Roman" panose="02020603050405020304" pitchFamily="18" charset="0"/>
+                <a:ea typeface="Inter" pitchFamily="34" charset="-122"/>
+                <a:cs typeface="Times New Roman" panose="02020603050405020304" pitchFamily="18" charset="0"/>
+              </a:rPr>
+              <a:t>ость</a:t>
+            </a:r>
+            <a:endParaRPr lang="en-US" sz="2400" dirty="0">
+              <a:latin typeface="Times New Roman" panose="02020603050405020304" pitchFamily="18" charset="0"/>
+              <a:cs typeface="Times New Roman" panose="02020603050405020304" pitchFamily="18" charset="0"/>
+            </a:endParaRPr>
+          </a:p>
+          <a:p>
+            <a:pPr marL="0" indent="0">
+              <a:lnSpc>
+                <a:spcPct val="150000"/>
+              </a:lnSpc>
+              <a:buSzPct val="100000"/>
+              <a:buNone/>
+            </a:pPr>
+            <a:r>
+              <a:rPr lang="ru-RU" sz="2400" dirty="0" smtClean="0">
+                <a:solidFill>
+                  <a:srgbClr val="272525"/>
+                </a:solidFill>
+                <a:latin typeface="Times New Roman" panose="02020603050405020304" pitchFamily="18" charset="0"/>
+                <a:ea typeface="Inter" pitchFamily="34" charset="-122"/>
+                <a:cs typeface="Times New Roman" panose="02020603050405020304" pitchFamily="18" charset="0"/>
+              </a:rPr>
+              <a:t>2. </a:t>
+            </a:r>
+            <a:r>
+              <a:rPr lang="ru-RU" sz="2400" dirty="0">
+                <a:latin typeface="Times New Roman" panose="02020603050405020304" pitchFamily="18" charset="0"/>
+                <a:cs typeface="Times New Roman" panose="02020603050405020304" pitchFamily="18" charset="0"/>
+              </a:rPr>
+              <a:t>Адаптивный </a:t>
+            </a:r>
+            <a:r>
+              <a:rPr lang="ru-RU" sz="2400" dirty="0" smtClean="0">
+                <a:latin typeface="Times New Roman" panose="02020603050405020304" pitchFamily="18" charset="0"/>
+                <a:cs typeface="Times New Roman" panose="02020603050405020304" pitchFamily="18" charset="0"/>
+              </a:rPr>
+              <a:t>веб-дизайн</a:t>
+            </a:r>
+          </a:p>
+          <a:p>
+            <a:pPr marL="0" indent="0">
+              <a:lnSpc>
+                <a:spcPct val="150000"/>
+              </a:lnSpc>
+              <a:buSzPct val="100000"/>
+              <a:buNone/>
+            </a:pPr>
+            <a:r>
+              <a:rPr lang="ru-RU" sz="2400" dirty="0" smtClean="0">
+                <a:solidFill>
+                  <a:srgbClr val="272525"/>
+                </a:solidFill>
+                <a:latin typeface="Times New Roman" panose="02020603050405020304" pitchFamily="18" charset="0"/>
+                <a:ea typeface="Inter" pitchFamily="34" charset="-122"/>
+                <a:cs typeface="Times New Roman" panose="02020603050405020304" pitchFamily="18" charset="0"/>
+              </a:rPr>
+              <a:t>3. </a:t>
+            </a:r>
+            <a:r>
+              <a:rPr lang="ru-RU" sz="2400" dirty="0" smtClean="0">
+                <a:latin typeface="Times New Roman" panose="02020603050405020304" pitchFamily="18" charset="0"/>
+                <a:cs typeface="Times New Roman" panose="02020603050405020304" pitchFamily="18" charset="0"/>
+              </a:rPr>
+              <a:t>Гибкие сетки и блоки</a:t>
+            </a:r>
+            <a:endParaRPr lang="ru-RU" sz="2400" dirty="0">
+              <a:latin typeface="Times New Roman" panose="02020603050405020304" pitchFamily="18" charset="0"/>
+              <a:cs typeface="Times New Roman" panose="02020603050405020304" pitchFamily="18" charset="0"/>
+            </a:endParaRPr>
+          </a:p>
+          <a:p>
+            <a:pPr marL="0" indent="0">
+              <a:lnSpc>
+                <a:spcPct val="150000"/>
+              </a:lnSpc>
+              <a:buSzPct val="100000"/>
+              <a:buNone/>
+            </a:pPr>
+            <a:r>
+              <a:rPr lang="ru-RU" sz="2400" dirty="0" smtClean="0">
+                <a:solidFill>
+                  <a:srgbClr val="272525"/>
+                </a:solidFill>
+                <a:latin typeface="Times New Roman" panose="02020603050405020304" pitchFamily="18" charset="0"/>
+                <a:ea typeface="Inter" pitchFamily="34" charset="-122"/>
+                <a:cs typeface="Times New Roman" panose="02020603050405020304" pitchFamily="18" charset="0"/>
+              </a:rPr>
+              <a:t>4. </a:t>
+            </a:r>
+            <a:r>
+              <a:rPr lang="ru-RU" sz="2400" dirty="0" err="1" smtClean="0">
+                <a:latin typeface="Times New Roman" panose="02020603050405020304" pitchFamily="18" charset="0"/>
+                <a:cs typeface="Times New Roman" panose="02020603050405020304" pitchFamily="18" charset="0"/>
+              </a:rPr>
+              <a:t>Медиазапросы</a:t>
+            </a:r>
+            <a:r>
+              <a:rPr lang="ru-RU" sz="2400" dirty="0" smtClean="0">
+                <a:latin typeface="Times New Roman" panose="02020603050405020304" pitchFamily="18" charset="0"/>
+                <a:cs typeface="Times New Roman" panose="02020603050405020304" pitchFamily="18" charset="0"/>
+              </a:rPr>
+              <a:t> и </a:t>
+            </a:r>
+            <a:r>
+              <a:rPr lang="ru-RU" sz="2400" dirty="0" err="1" smtClean="0">
+                <a:latin typeface="Times New Roman" panose="02020603050405020304" pitchFamily="18" charset="0"/>
+                <a:cs typeface="Times New Roman" panose="02020603050405020304" pitchFamily="18" charset="0"/>
+              </a:rPr>
+              <a:t>адаптируемость</a:t>
+            </a:r>
+            <a:r>
+              <a:rPr lang="ru-RU" sz="2400" dirty="0" smtClean="0">
+                <a:latin typeface="Times New Roman" panose="02020603050405020304" pitchFamily="18" charset="0"/>
+                <a:cs typeface="Times New Roman" panose="02020603050405020304" pitchFamily="18" charset="0"/>
+              </a:rPr>
+              <a:t> под разные устройства</a:t>
+            </a:r>
+            <a:endParaRPr lang="ru-RU" sz="2400" dirty="0">
+              <a:latin typeface="Times New Roman" panose="02020603050405020304" pitchFamily="18" charset="0"/>
+              <a:cs typeface="Times New Roman" panose="02020603050405020304" pitchFamily="18" charset="0"/>
+            </a:endParaRPr>
+          </a:p>
+          <a:p>
+            <a:pPr marL="0" indent="0">
+              <a:lnSpc>
+                <a:spcPct val="150000"/>
+              </a:lnSpc>
+              <a:buSzPct val="100000"/>
+              <a:buNone/>
+            </a:pPr>
+            <a:r>
+              <a:rPr lang="ru-RU" sz="2400" dirty="0" smtClean="0">
+                <a:solidFill>
+                  <a:srgbClr val="272525"/>
+                </a:solidFill>
+                <a:latin typeface="Times New Roman" panose="02020603050405020304" pitchFamily="18" charset="0"/>
+                <a:ea typeface="Inter" pitchFamily="34" charset="-122"/>
+                <a:cs typeface="Times New Roman" panose="02020603050405020304" pitchFamily="18" charset="0"/>
+              </a:rPr>
+              <a:t>5. </a:t>
+            </a:r>
+            <a:r>
+              <a:rPr lang="ru-RU" sz="2400" dirty="0">
+                <a:latin typeface="Times New Roman" panose="02020603050405020304" pitchFamily="18" charset="0"/>
+                <a:cs typeface="Times New Roman" panose="02020603050405020304" pitchFamily="18" charset="0"/>
+              </a:rPr>
+              <a:t>Адаптивная </a:t>
+            </a:r>
+            <a:r>
+              <a:rPr lang="ru-RU" sz="2400" dirty="0" err="1" smtClean="0">
+                <a:latin typeface="Times New Roman" panose="02020603050405020304" pitchFamily="18" charset="0"/>
+                <a:cs typeface="Times New Roman" panose="02020603050405020304" pitchFamily="18" charset="0"/>
+              </a:rPr>
+              <a:t>типографика</a:t>
+            </a:r>
+            <a:endParaRPr lang="ru-RU" sz="2400" dirty="0" smtClean="0">
+              <a:latin typeface="Times New Roman" panose="02020603050405020304" pitchFamily="18" charset="0"/>
+              <a:cs typeface="Times New Roman" panose="02020603050405020304" pitchFamily="18" charset="0"/>
+            </a:endParaRPr>
+          </a:p>
+          <a:p>
+            <a:pPr marL="0" indent="0">
+              <a:lnSpc>
+                <a:spcPct val="150000"/>
+              </a:lnSpc>
+              <a:buSzPct val="100000"/>
+              <a:buNone/>
+            </a:pPr>
+            <a:r>
+              <a:rPr lang="ru-RU" sz="2400" dirty="0" smtClean="0">
+                <a:latin typeface="Times New Roman" panose="02020603050405020304" pitchFamily="18" charset="0"/>
+                <a:cs typeface="Times New Roman" panose="02020603050405020304" pitchFamily="18" charset="0"/>
+              </a:rPr>
+              <a:t>6. </a:t>
+            </a:r>
+            <a:r>
+              <a:rPr lang="ru-RU" sz="2400" dirty="0">
+                <a:latin typeface="Times New Roman" panose="02020603050405020304" pitchFamily="18" charset="0"/>
+                <a:cs typeface="Times New Roman" panose="02020603050405020304" pitchFamily="18" charset="0"/>
+              </a:rPr>
+              <a:t>Унификация контента (</a:t>
+            </a:r>
+            <a:r>
+              <a:rPr lang="en-US" sz="2400" dirty="0">
+                <a:latin typeface="Times New Roman" panose="02020603050405020304" pitchFamily="18" charset="0"/>
+                <a:cs typeface="Times New Roman" panose="02020603050405020304" pitchFamily="18" charset="0"/>
+              </a:rPr>
+              <a:t>One Web</a:t>
+            </a:r>
+            <a:r>
+              <a:rPr lang="en-US" sz="2400" dirty="0" smtClean="0">
+                <a:latin typeface="Times New Roman" panose="02020603050405020304" pitchFamily="18" charset="0"/>
+                <a:cs typeface="Times New Roman" panose="02020603050405020304" pitchFamily="18" charset="0"/>
+              </a:rPr>
+              <a:t>)</a:t>
+            </a:r>
+            <a:endParaRPr lang="en-US" sz="2400" dirty="0">
+              <a:latin typeface="Times New Roman" panose="02020603050405020304" pitchFamily="18" charset="0"/>
+              <a:cs typeface="Times New Roman" panose="02020603050405020304" pitchFamily="18" charset="0"/>
+            </a:endParaRPr>
+          </a:p>
+        </p:txBody>
+      </p:sp>
+    </p:spTree>
+    <p:extLst>
+      <p:ext uri="{BB962C8B-B14F-4D97-AF65-F5344CB8AC3E}">
+        <p14:creationId xmlns:p14="http://schemas.microsoft.com/office/powerpoint/2010/main" val="3945099897"/>
+      </p:ext>
+    </p:extLst>
+  </p:cSld>
+  <p:clrMapOvr>
+    <a:masterClrMapping/>
+  </p:clrMapOvr>
+</p:sld>
+</file>
+
+<file path=ppt/slides/slide8.xml><?xml version="1.0" encoding="utf-8"?>
+<p:sld xmlns:a="http://schemas.openxmlformats.org/drawingml/2006/main" xmlns:r="http://schemas.openxmlformats.org/officeDocument/2006/relationships" xmlns:p="http://schemas.openxmlformats.org/presentationml/2006/main">
+  <p:cSld>
+    <p:spTree>
+      <p:nvGrpSpPr>
+        <p:cNvPr id="1" name=""/>
+        <p:cNvGrpSpPr/>
+        <p:nvPr/>
+      </p:nvGrpSpPr>
+      <p:grpSpPr>
+        <a:xfrm>
+          <a:off x="0" y="0"/>
+          <a:ext cx="0" cy="0"/>
+          <a:chOff x="0" y="0"/>
+          <a:chExt cx="0" cy="0"/>
+        </a:xfrm>
+      </p:grpSpPr>
+      <p:sp>
+        <p:nvSpPr>
+          <p:cNvPr id="2" name="Заголовок 1"/>
+          <p:cNvSpPr>
+            <a:spLocks noGrp="1"/>
+          </p:cNvSpPr>
+          <p:nvPr>
+            <p:ph type="title"/>
+          </p:nvPr>
+        </p:nvSpPr>
+        <p:spPr/>
+        <p:txBody>
+          <a:bodyPr>
+            <a:normAutofit/>
+          </a:bodyPr>
+          <a:lstStyle/>
+          <a:p>
+            <a:r>
+              <a:rPr lang="ru-RU" sz="2800" dirty="0" smtClean="0">
+                <a:latin typeface="Times New Roman" pitchFamily="18" charset="0"/>
+                <a:cs typeface="Times New Roman" pitchFamily="18" charset="0"/>
+              </a:rPr>
+              <a:t>Технологии разработки</a:t>
+            </a:r>
+            <a:endParaRPr lang="ru-RU" sz="2800" dirty="0">
+              <a:latin typeface="Times New Roman" pitchFamily="18" charset="0"/>
+              <a:cs typeface="Times New Roman" pitchFamily="18" charset="0"/>
+            </a:endParaRPr>
+          </a:p>
+        </p:txBody>
+      </p:sp>
+      <p:sp>
+        <p:nvSpPr>
+          <p:cNvPr id="3" name="Объект 2"/>
+          <p:cNvSpPr>
+            <a:spLocks noGrp="1"/>
+          </p:cNvSpPr>
+          <p:nvPr>
+            <p:ph idx="1"/>
+          </p:nvPr>
+        </p:nvSpPr>
+        <p:spPr/>
+        <p:txBody>
+          <a:bodyPr>
+            <a:normAutofit/>
+          </a:bodyPr>
+          <a:lstStyle/>
+          <a:p>
+            <a:pPr>
+              <a:lnSpc>
+                <a:spcPct val="150000"/>
+              </a:lnSpc>
+            </a:pPr>
+            <a:r>
+              <a:rPr lang="ru-RU" sz="2400" dirty="0" smtClean="0">
+                <a:latin typeface="Times New Roman" pitchFamily="18" charset="0"/>
+                <a:cs typeface="Times New Roman" pitchFamily="18" charset="0"/>
+              </a:rPr>
+              <a:t>Адаптивность сайта достигалась при помощи гибких сеток и блоков ( </a:t>
+            </a:r>
+            <a:r>
+              <a:rPr lang="en-US" sz="2400" dirty="0" smtClean="0">
+                <a:latin typeface="Times New Roman" pitchFamily="18" charset="0"/>
+                <a:cs typeface="Times New Roman" pitchFamily="18" charset="0"/>
+              </a:rPr>
+              <a:t>flexbox </a:t>
+            </a:r>
+            <a:r>
+              <a:rPr lang="ru-RU" sz="2400" dirty="0" smtClean="0">
+                <a:latin typeface="Times New Roman" pitchFamily="18" charset="0"/>
+                <a:cs typeface="Times New Roman" pitchFamily="18" charset="0"/>
+              </a:rPr>
+              <a:t>и </a:t>
+            </a:r>
+            <a:r>
+              <a:rPr lang="en-US" sz="2400" dirty="0" smtClean="0">
+                <a:latin typeface="Times New Roman" pitchFamily="18" charset="0"/>
+                <a:cs typeface="Times New Roman" pitchFamily="18" charset="0"/>
+              </a:rPr>
+              <a:t>grid)</a:t>
+            </a:r>
+            <a:r>
+              <a:rPr lang="ru-RU" sz="2400" dirty="0" smtClean="0">
+                <a:latin typeface="Times New Roman" pitchFamily="18" charset="0"/>
+                <a:cs typeface="Times New Roman" pitchFamily="18" charset="0"/>
+              </a:rPr>
+              <a:t>, </a:t>
+            </a:r>
+            <a:r>
+              <a:rPr lang="ru-RU" sz="2400" dirty="0" err="1" smtClean="0">
+                <a:latin typeface="Times New Roman" pitchFamily="18" charset="0"/>
+                <a:cs typeface="Times New Roman" pitchFamily="18" charset="0"/>
+              </a:rPr>
+              <a:t>медиазапросов</a:t>
+            </a:r>
+            <a:r>
+              <a:rPr lang="ru-RU" sz="2400" dirty="0" smtClean="0">
+                <a:latin typeface="Times New Roman" pitchFamily="18" charset="0"/>
+                <a:cs typeface="Times New Roman" pitchFamily="18" charset="0"/>
+              </a:rPr>
+              <a:t>.</a:t>
+            </a:r>
+          </a:p>
+          <a:p>
+            <a:pPr>
+              <a:lnSpc>
+                <a:spcPct val="150000"/>
+              </a:lnSpc>
+            </a:pPr>
+            <a:r>
+              <a:rPr lang="ru-RU" sz="2400" dirty="0" smtClean="0">
+                <a:latin typeface="Times New Roman" pitchFamily="18" charset="0"/>
+                <a:cs typeface="Times New Roman" pitchFamily="18" charset="0"/>
+              </a:rPr>
+              <a:t>Адаптив</a:t>
+            </a:r>
+            <a:r>
+              <a:rPr lang="ru-RU" sz="2400" dirty="0">
+                <a:latin typeface="Times New Roman" pitchFamily="18" charset="0"/>
+                <a:cs typeface="Times New Roman" pitchFamily="18" charset="0"/>
+              </a:rPr>
+              <a:t>н</a:t>
+            </a:r>
+            <a:r>
+              <a:rPr lang="ru-RU" sz="2400" dirty="0" smtClean="0">
+                <a:latin typeface="Times New Roman" pitchFamily="18" charset="0"/>
+                <a:cs typeface="Times New Roman" pitchFamily="18" charset="0"/>
+              </a:rPr>
+              <a:t>ое меню под мобильные телефоны было реализовано при помощи кода на </a:t>
+            </a:r>
+            <a:r>
+              <a:rPr lang="en-US" sz="2400" dirty="0" smtClean="0">
+                <a:latin typeface="Times New Roman" pitchFamily="18" charset="0"/>
+                <a:cs typeface="Times New Roman" pitchFamily="18" charset="0"/>
+              </a:rPr>
+              <a:t>JavaScript</a:t>
+            </a:r>
+            <a:r>
+              <a:rPr lang="ru-RU" sz="2400" dirty="0" smtClean="0">
+                <a:latin typeface="Times New Roman" pitchFamily="18" charset="0"/>
+                <a:cs typeface="Times New Roman" pitchFamily="18" charset="0"/>
+              </a:rPr>
+              <a:t>, сворачивается в иконку «гамбургер»</a:t>
+            </a:r>
+          </a:p>
+          <a:p>
+            <a:pPr>
+              <a:lnSpc>
+                <a:spcPct val="150000"/>
+              </a:lnSpc>
+            </a:pPr>
+            <a:r>
+              <a:rPr lang="en-US" sz="2400" dirty="0" smtClean="0">
+                <a:latin typeface="Times New Roman" pitchFamily="18" charset="0"/>
+                <a:cs typeface="Times New Roman" pitchFamily="18" charset="0"/>
+              </a:rPr>
+              <a:t>One Web - </a:t>
+            </a:r>
+            <a:r>
+              <a:rPr lang="ru-RU" sz="2400" dirty="0" smtClean="0">
+                <a:latin typeface="Times New Roman" pitchFamily="18" charset="0"/>
+                <a:cs typeface="Times New Roman" pitchFamily="18" charset="0"/>
+              </a:rPr>
+              <a:t>на </a:t>
+            </a:r>
+            <a:r>
+              <a:rPr lang="ru-RU" sz="2400" dirty="0">
+                <a:latin typeface="Times New Roman" pitchFamily="18" charset="0"/>
+                <a:cs typeface="Times New Roman" pitchFamily="18" charset="0"/>
+              </a:rPr>
+              <a:t>всех устройствах доступен один и тот же </a:t>
+            </a:r>
+            <a:r>
+              <a:rPr lang="ru-RU" sz="2400" dirty="0" smtClean="0">
+                <a:latin typeface="Times New Roman" pitchFamily="18" charset="0"/>
+                <a:cs typeface="Times New Roman" pitchFamily="18" charset="0"/>
+              </a:rPr>
+              <a:t>HTML-код, </a:t>
+            </a:r>
+            <a:r>
+              <a:rPr lang="ru-RU" sz="2400" dirty="0">
+                <a:latin typeface="Times New Roman" pitchFamily="18" charset="0"/>
+                <a:cs typeface="Times New Roman" pitchFamily="18" charset="0"/>
+              </a:rPr>
+              <a:t>без отдельных мобильных </a:t>
+            </a:r>
+            <a:r>
+              <a:rPr lang="ru-RU" sz="2400" dirty="0" err="1" smtClean="0">
+                <a:latin typeface="Times New Roman" pitchFamily="18" charset="0"/>
+                <a:cs typeface="Times New Roman" pitchFamily="18" charset="0"/>
+              </a:rPr>
+              <a:t>поддоменов</a:t>
+            </a:r>
+            <a:r>
+              <a:rPr lang="ru-RU" sz="2400" dirty="0" smtClean="0">
+                <a:latin typeface="Times New Roman" pitchFamily="18" charset="0"/>
+                <a:cs typeface="Times New Roman" pitchFamily="18" charset="0"/>
+              </a:rPr>
+              <a:t>.</a:t>
+            </a:r>
+            <a:endParaRPr lang="en-US" sz="2400" dirty="0" smtClean="0">
+              <a:latin typeface="Times New Roman" pitchFamily="18" charset="0"/>
+              <a:cs typeface="Times New Roman" pitchFamily="18" charset="0"/>
+            </a:endParaRPr>
+          </a:p>
+          <a:p>
+            <a:pPr>
+              <a:lnSpc>
+                <a:spcPct val="150000"/>
+              </a:lnSpc>
+            </a:pPr>
+            <a:r>
+              <a:rPr lang="ru-RU" sz="2400" dirty="0">
+                <a:latin typeface="Times New Roman" pitchFamily="18" charset="0"/>
+                <a:cs typeface="Times New Roman" pitchFamily="18" charset="0"/>
+              </a:rPr>
+              <a:t>Принцип </a:t>
+            </a:r>
+            <a:r>
+              <a:rPr lang="en-US" sz="2400" dirty="0">
+                <a:latin typeface="Times New Roman" pitchFamily="18" charset="0"/>
+                <a:cs typeface="Times New Roman" pitchFamily="18" charset="0"/>
+              </a:rPr>
+              <a:t>Mobile </a:t>
+            </a:r>
+            <a:r>
+              <a:rPr lang="en-US" sz="2400" dirty="0" smtClean="0">
+                <a:latin typeface="Times New Roman" pitchFamily="18" charset="0"/>
+                <a:cs typeface="Times New Roman" pitchFamily="18" charset="0"/>
+              </a:rPr>
+              <a:t>First</a:t>
+            </a:r>
+            <a:endParaRPr lang="en-US" sz="2400" dirty="0">
+              <a:latin typeface="Times New Roman" pitchFamily="18" charset="0"/>
+              <a:cs typeface="Times New Roman" pitchFamily="18" charset="0"/>
+            </a:endParaRPr>
+          </a:p>
+        </p:txBody>
+      </p:sp>
+    </p:spTree>
+    <p:extLst>
+      <p:ext uri="{BB962C8B-B14F-4D97-AF65-F5344CB8AC3E}">
+        <p14:creationId xmlns:p14="http://schemas.microsoft.com/office/powerpoint/2010/main" val="4032254139"/>
+      </p:ext>
+    </p:extLst>
+  </p:cSld>
+  <p:clrMapOvr>
+    <a:masterClrMapping/>
+  </p:clrMapOvr>
+</p:sld>
+</file>
+
+<file path=ppt/slides/slide9.xml><?xml version="1.0" encoding="utf-8"?>
 <p:sld xmlns:a="http://schemas.openxmlformats.org/drawingml/2006/main" xmlns:r="http://schemas.openxmlformats.org/officeDocument/2006/relationships" xmlns:p="http://schemas.openxmlformats.org/presentationml/2006/main" showMasterPhAnim="0">
   <p:cSld>
     <p:spTree>
@@ -5976,269 +6193,6 @@
       </p:grpSpPr>
       <p:sp>
         <p:nvSpPr>
-          <p:cNvPr id="5" name="Прямоугольник 4"/>
-          <p:cNvSpPr/>
-          <p:nvPr/>
-        </p:nvSpPr>
-        <p:spPr bwMode="auto">
-          <a:xfrm>
-            <a:off x="246888" y="1859340"/>
-            <a:ext cx="11612880" cy="3416320"/>
-          </a:xfrm>
-          <a:prstGeom prst="rect">
-            <a:avLst/>
-          </a:prstGeom>
-        </p:spPr>
-        <p:txBody>
-          <a:bodyPr wrap="square">
-            <a:spAutoFit/>
-          </a:bodyPr>
-          <a:lstStyle/>
-          <a:p>
-            <a:pPr>
-              <a:defRPr/>
-            </a:pPr>
-            <a:r>
-              <a:rPr lang="ru-RU" sz="2400">
-                <a:latin typeface="Times New Roman"/>
-                <a:cs typeface="Times New Roman"/>
-              </a:rPr>
-              <a:t>	</a:t>
-            </a:r>
-            <a:r>
-              <a:rPr lang="ru-RU" sz="2400" b="1">
-                <a:latin typeface="Times New Roman"/>
-                <a:cs typeface="Times New Roman"/>
-              </a:rPr>
-              <a:t>Запрещенные</a:t>
-            </a:r>
-            <a:r>
-              <a:rPr lang="ru-RU" sz="2400">
-                <a:latin typeface="Times New Roman"/>
-                <a:cs typeface="Times New Roman"/>
-              </a:rPr>
-              <a:t> законодательством </a:t>
-            </a:r>
-            <a:r>
-              <a:rPr lang="ru-RU" sz="2400" b="1">
-                <a:latin typeface="Times New Roman"/>
-                <a:cs typeface="Times New Roman"/>
-              </a:rPr>
-              <a:t>виды работ</a:t>
-            </a:r>
-            <a:r>
-              <a:rPr lang="ru-RU" sz="2400">
-                <a:latin typeface="Times New Roman"/>
-                <a:cs typeface="Times New Roman"/>
-              </a:rPr>
-              <a:t>:</a:t>
-            </a:r>
-            <a:endParaRPr/>
-          </a:p>
-          <a:p>
-            <a:pPr>
-              <a:defRPr/>
-            </a:pPr>
-            <a:endParaRPr lang="ru-RU" sz="2400">
-              <a:latin typeface="Times New Roman"/>
-              <a:cs typeface="Times New Roman"/>
-            </a:endParaRPr>
-          </a:p>
-          <a:p>
-            <a:pPr lvl="0">
-              <a:defRPr/>
-            </a:pPr>
-            <a:r>
-              <a:rPr lang="ru-RU" sz="2400">
-                <a:latin typeface="Times New Roman"/>
-                <a:cs typeface="Times New Roman"/>
-              </a:rPr>
-              <a:t>	- совместительство;</a:t>
-            </a:r>
-            <a:endParaRPr/>
-          </a:p>
-          <a:p>
-            <a:pPr lvl="0">
-              <a:defRPr/>
-            </a:pPr>
-            <a:endParaRPr lang="ru-RU" sz="2400">
-              <a:latin typeface="Times New Roman"/>
-              <a:cs typeface="Times New Roman"/>
-            </a:endParaRPr>
-          </a:p>
-          <a:p>
-            <a:pPr lvl="0">
-              <a:defRPr/>
-            </a:pPr>
-            <a:r>
-              <a:rPr lang="ru-RU" sz="2400">
-                <a:latin typeface="Times New Roman"/>
-                <a:cs typeface="Times New Roman"/>
-              </a:rPr>
-              <a:t>	- на работах с вредными и опасными условиями труда;</a:t>
-            </a:r>
-            <a:endParaRPr/>
-          </a:p>
-          <a:p>
-            <a:pPr lvl="0">
-              <a:defRPr/>
-            </a:pPr>
-            <a:endParaRPr lang="ru-RU" sz="2400">
-              <a:latin typeface="Times New Roman"/>
-              <a:cs typeface="Times New Roman"/>
-            </a:endParaRPr>
-          </a:p>
-          <a:p>
-            <a:pPr lvl="0">
-              <a:defRPr/>
-            </a:pPr>
-            <a:r>
-              <a:rPr lang="ru-RU" sz="2400">
-                <a:latin typeface="Times New Roman"/>
-                <a:cs typeface="Times New Roman"/>
-              </a:rPr>
-              <a:t>	- в религиозных учреждениях;</a:t>
-            </a:r>
-            <a:endParaRPr/>
-          </a:p>
-          <a:p>
-            <a:pPr lvl="0">
-              <a:defRPr/>
-            </a:pPr>
-            <a:endParaRPr lang="ru-RU" sz="2400">
-              <a:latin typeface="Times New Roman"/>
-              <a:cs typeface="Times New Roman"/>
-            </a:endParaRPr>
-          </a:p>
-          <a:p>
-            <a:pPr lvl="0">
-              <a:defRPr/>
-            </a:pPr>
-            <a:r>
-              <a:rPr lang="ru-RU" sz="2400">
-                <a:latin typeface="Times New Roman"/>
-                <a:cs typeface="Times New Roman"/>
-              </a:rPr>
-              <a:t>	- в выходные дни, в ночное время, на подземных работах.</a:t>
-            </a:r>
-            <a:endParaRPr/>
-          </a:p>
-        </p:txBody>
-      </p:sp>
-      <p:sp>
-        <p:nvSpPr>
-          <p:cNvPr id="7" name="Заголовок 1"/>
-          <p:cNvSpPr>
-            <a:spLocks noGrp="1"/>
-          </p:cNvSpPr>
-          <p:nvPr>
-            <p:ph type="ctrTitle"/>
-          </p:nvPr>
-        </p:nvSpPr>
-        <p:spPr bwMode="auto">
-          <a:xfrm>
-            <a:off x="1481328" y="337251"/>
-            <a:ext cx="9144000" cy="385959"/>
-          </a:xfrm>
-        </p:spPr>
-        <p:txBody>
-          <a:bodyPr>
-            <a:noAutofit/>
-          </a:bodyPr>
-          <a:lstStyle/>
-          <a:p>
-            <a:pPr>
-              <a:defRPr/>
-            </a:pPr>
-            <a:r>
-              <a:rPr lang="ru-RU" sz="2800" b="1">
-                <a:latin typeface="Times New Roman"/>
-                <a:cs typeface="Times New Roman"/>
-              </a:rPr>
-              <a:t>Трудовые</a:t>
-            </a:r>
-            <a:r>
-              <a:rPr lang="ru-RU" sz="2800" b="1">
-                <a:solidFill>
-                  <a:srgbClr val="FFC000"/>
-                </a:solidFill>
-                <a:latin typeface="Times New Roman"/>
-                <a:cs typeface="Times New Roman"/>
-              </a:rPr>
-              <a:t> </a:t>
-            </a:r>
-            <a:r>
-              <a:rPr lang="ru-RU" sz="2800" b="1">
-                <a:latin typeface="Times New Roman"/>
-                <a:cs typeface="Times New Roman"/>
-              </a:rPr>
-              <a:t>правила</a:t>
-            </a:r>
-            <a:r>
-              <a:rPr lang="ru-RU" sz="2800" b="1">
-                <a:solidFill>
-                  <a:srgbClr val="FFC000"/>
-                </a:solidFill>
-                <a:latin typeface="Times New Roman"/>
-                <a:cs typeface="Times New Roman"/>
-              </a:rPr>
-              <a:t> </a:t>
-            </a:r>
-            <a:r>
-              <a:rPr lang="ru-RU" sz="2800" b="1">
-                <a:latin typeface="Times New Roman"/>
-                <a:cs typeface="Times New Roman"/>
-              </a:rPr>
-              <a:t>и</a:t>
-            </a:r>
-            <a:r>
-              <a:rPr lang="ru-RU" sz="2800" b="1">
-                <a:solidFill>
-                  <a:srgbClr val="FFC000"/>
-                </a:solidFill>
-                <a:latin typeface="Times New Roman"/>
-                <a:cs typeface="Times New Roman"/>
-              </a:rPr>
-              <a:t> </a:t>
-            </a:r>
-            <a:r>
-              <a:rPr lang="ru-RU" sz="2800" b="1">
-                <a:latin typeface="Times New Roman"/>
-                <a:cs typeface="Times New Roman"/>
-              </a:rPr>
-              <a:t>ограничения</a:t>
-            </a:r>
-            <a:endParaRPr/>
-          </a:p>
-        </p:txBody>
-      </p:sp>
-    </p:spTree>
-  </p:cSld>
-  <p:clrMapOvr>
-    <a:masterClrMapping/>
-  </p:clrMapOvr>
-</p:sld>
-</file>
-
-<file path=ppt/slides/slide8.xml><?xml version="1.0" encoding="utf-8"?>
-<p:sld xmlns:a="http://schemas.openxmlformats.org/drawingml/2006/main" xmlns:r="http://schemas.openxmlformats.org/officeDocument/2006/relationships" xmlns:p="http://schemas.openxmlformats.org/presentationml/2006/main" showMasterPhAnim="0">
-  <p:cSld>
-    <p:spTree>
-      <p:nvGrpSpPr>
-        <p:cNvPr id="1" name=""/>
-        <p:cNvGrpSpPr/>
-        <p:nvPr/>
-      </p:nvGrpSpPr>
-      <p:grpSpPr bwMode="auto">
-        <a:xfrm>
-          <a:off x="0" y="0"/>
-          <a:ext cx="0" cy="0"/>
-          <a:chOff x="0" y="0"/>
-          <a:chExt cx="0" cy="0"/>
-        </a:xfrm>
-      </p:grpSpPr>
-      <p:sp>
-        <p:nvSpPr>
           <p:cNvPr id="2" name="Заголовок 1"/>
           <p:cNvSpPr>
             <a:spLocks noGrp="1"/>
@@ -6256,21 +6210,21 @@
               <a:defRPr/>
             </a:pPr>
             <a:r>
-              <a:rPr lang="ru-RU" sz="2800" b="1" dirty="0">
+              <a:rPr lang="ru-RU" sz="2800" b="1" dirty="0" smtClean="0">
                 <a:latin typeface="Times New Roman"/>
                 <a:cs typeface="Times New Roman"/>
               </a:rPr>
               <a:t>Ссылки на</a:t>
             </a:r>
             <a:r>
-              <a:rPr lang="ru-RU" b="1" dirty="0">
+              <a:rPr lang="ru-RU" b="1" dirty="0" smtClean="0">
                 <a:latin typeface="Times New Roman"/>
                 <a:cs typeface="Times New Roman"/>
               </a:rPr>
               <a:t> </a:t>
             </a:r>
             <a:r>
-              <a:rPr lang="ru-RU" sz="2800" b="1" dirty="0">
+              <a:rPr lang="ru-RU" sz="2800" b="1" dirty="0" smtClean="0">
                 <a:latin typeface="Times New Roman"/>
                 <a:cs typeface="Times New Roman"/>
               </a:rPr>
@@ -6295,7 +6249,9 @@
         </p:nvSpPr>
         <p:spPr bwMode="auto"/>
         <p:txBody>
-          <a:bodyPr/>
+          <a:bodyPr>
+            <a:normAutofit/>
+          </a:bodyPr>
           <a:lstStyle/>
           <a:p>
             <a:pPr marL="0" indent="0" algn="ctr">
@@ -6303,10 +6259,16 @@
               <a:defRPr/>
             </a:pPr>
             <a:r>
-              <a:rPr lang="en-US" dirty="0"/>
+              <a:rPr lang="en-US" sz="2800" dirty="0">
+                <a:latin typeface="Times New Roman" pitchFamily="18" charset="0"/>
+                <a:cs typeface="Times New Roman" pitchFamily="18" charset="0"/>
+              </a:rPr>
               <a:t>https://rabota-snezhinsk.ru/index.html</a:t>
             </a:r>
-            <a:endParaRPr lang="ru-RU" dirty="0"/>
+            <a:endParaRPr lang="ru-RU" sz="2800" dirty="0">
+              <a:latin typeface="Times New Roman" pitchFamily="18" charset="0"/>
+              <a:cs typeface="Times New Roman" pitchFamily="18" charset="0"/>
+            </a:endParaRPr>
           </a:p>
         </p:txBody>
       </p:sp>
@@ -6398,133 +6360,6 @@
         </p:spPr>
       </p:pic>
     </p:spTree>
-  </p:cSld>
-  <p:clrMapOvr>
-    <a:masterClrMapping/>
-  </p:clrMapOvr>
-</p:sld>
-</file>
-
-<file path=ppt/slides/slide9.xml><?xml version="1.0" encoding="utf-8"?>
-<p:sld xmlns:a="http://schemas.openxmlformats.org/drawingml/2006/main" xmlns:r="http://schemas.openxmlformats.org/officeDocument/2006/relationships" xmlns:p="http://schemas.openxmlformats.org/presentationml/2006/main">
-  <p:cSld>
-    <p:spTree>
-      <p:nvGrpSpPr>
-        <p:cNvPr id="1" name=""/>
-        <p:cNvGrpSpPr/>
-        <p:nvPr/>
-      </p:nvGrpSpPr>
-      <p:grpSpPr>
-        <a:xfrm>
-          <a:off x="0" y="0"/>
-          <a:ext cx="0" cy="0"/>
-          <a:chOff x="0" y="0"/>
-          <a:chExt cx="0" cy="0"/>
-        </a:xfrm>
-      </p:grpSpPr>
-      <p:sp>
-        <p:nvSpPr>
-          <p:cNvPr id="2" name="Заголовок 1"/>
-          <p:cNvSpPr>
-            <a:spLocks noGrp="1"/>
-          </p:cNvSpPr>
-          <p:nvPr>
-            <p:ph type="title"/>
-          </p:nvPr>
-        </p:nvSpPr>
-        <p:spPr/>
-        <p:txBody>
-          <a:bodyPr>
-            <a:normAutofit/>
-          </a:bodyPr>
-          <a:lstStyle/>
-          <a:p>
-            <a:r>
-              <a:rPr lang="ru-RU" sz="3200" b="1" dirty="0">
-                <a:latin typeface="Times New Roman" pitchFamily="18" charset="0"/>
-                <a:cs typeface="Times New Roman" pitchFamily="18" charset="0"/>
-              </a:rPr>
-              <a:t>Ссылки на материал проекта</a:t>
-            </a:r>
-            <a:endParaRPr lang="ru-RU" sz="3200" dirty="0">
-              <a:effectLst/>
-              <a:latin typeface="Times New Roman" pitchFamily="18" charset="0"/>
-              <a:cs typeface="Times New Roman" pitchFamily="18" charset="0"/>
-            </a:endParaRPr>
-          </a:p>
-        </p:txBody>
-      </p:sp>
-      <p:sp>
-        <p:nvSpPr>
-          <p:cNvPr id="3" name="Объект 2"/>
-          <p:cNvSpPr>
-            <a:spLocks noGrp="1"/>
-          </p:cNvSpPr>
-          <p:nvPr>
-            <p:ph idx="1"/>
-          </p:nvPr>
-        </p:nvSpPr>
-        <p:spPr>
-          <a:xfrm>
-            <a:off x="609600" y="1600203"/>
-            <a:ext cx="11389360" cy="4525963"/>
-          </a:xfrm>
-        </p:spPr>
-        <p:txBody>
-          <a:bodyPr/>
-          <a:lstStyle/>
-          <a:p>
-            <a:pPr marL="514350" indent="-514350">
-              <a:buFont typeface="+mj-lt"/>
-              <a:buAutoNum type="arabicPeriod"/>
-            </a:pPr>
-            <a:r>
-              <a:rPr lang="ru-RU" dirty="0"/>
-              <a:t>Трудовой кодекс - действующая редакция, актуальность 2025 г. [Электронный ресурс] trudinspection.ru/kodeks.html.</a:t>
-            </a:r>
-          </a:p>
-          <a:p>
-            <a:pPr marL="514350" indent="-514350">
-              <a:buFont typeface="+mj-lt"/>
-              <a:buAutoNum type="arabicPeriod"/>
-            </a:pPr>
-            <a:r>
-              <a:rPr lang="ru-RU" dirty="0"/>
-              <a:t>Сайт на программу в которой я  писал код(</a:t>
-            </a:r>
-            <a:r>
-              <a:rPr lang="en-US" dirty="0">
-                <a:hlinkClick r:id="rId2"/>
-              </a:rPr>
-              <a:t>https://code.visualstudio.com/</a:t>
-            </a:r>
-            <a:r>
-              <a:rPr lang="ru-RU" dirty="0"/>
-              <a:t>)</a:t>
-            </a:r>
-            <a:endParaRPr lang="en-US" dirty="0"/>
-          </a:p>
-          <a:p>
-            <a:pPr marL="0" indent="0">
-              <a:buNone/>
-            </a:pPr>
-            <a:endParaRPr lang="ru-RU" dirty="0"/>
-          </a:p>
-          <a:p>
-            <a:pPr marL="514350" indent="-514350">
-              <a:buFont typeface="+mj-lt"/>
-              <a:buAutoNum type="arabicPeriod"/>
-            </a:pPr>
-            <a:endParaRPr lang="ru-RU" dirty="0"/>
-          </a:p>
-        </p:txBody>
-      </p:sp>
-    </p:spTree>
-    <p:extLst>
-      <p:ext uri="{BB962C8B-B14F-4D97-AF65-F5344CB8AC3E}">
-        <p14:creationId xmlns:p14="http://schemas.microsoft.com/office/powerpoint/2010/main" val="443332714"/>
-      </p:ext>
-    </p:extLst>
   </p:cSld>
   <p:clrMapOvr>
     <a:masterClrMapping/>
